--- a/ClassMaterials/Macros3/Macros 2.pptx
+++ b/ClassMaterials/Macros3/Macros 2.pptx
@@ -8,15 +8,18 @@
     <p:sldId id="256" r:id="rId5"/>
     <p:sldId id="267" r:id="rId6"/>
     <p:sldId id="257" r:id="rId7"/>
-    <p:sldId id="258" r:id="rId8"/>
-    <p:sldId id="262" r:id="rId9"/>
-    <p:sldId id="259" r:id="rId10"/>
-    <p:sldId id="260" r:id="rId11"/>
-    <p:sldId id="261" r:id="rId12"/>
-    <p:sldId id="263" r:id="rId13"/>
-    <p:sldId id="264" r:id="rId14"/>
-    <p:sldId id="265" r:id="rId15"/>
-    <p:sldId id="266" r:id="rId16"/>
+    <p:sldId id="268" r:id="rId8"/>
+    <p:sldId id="269" r:id="rId9"/>
+    <p:sldId id="270" r:id="rId10"/>
+    <p:sldId id="258" r:id="rId11"/>
+    <p:sldId id="262" r:id="rId12"/>
+    <p:sldId id="259" r:id="rId13"/>
+    <p:sldId id="260" r:id="rId14"/>
+    <p:sldId id="261" r:id="rId15"/>
+    <p:sldId id="263" r:id="rId16"/>
+    <p:sldId id="264" r:id="rId17"/>
+    <p:sldId id="265" r:id="rId18"/>
+    <p:sldId id="266" r:id="rId19"/>
   </p:sldIdLst>
   <p:sldSz cx="12192000" cy="6858000"/>
   <p:notesSz cx="6858000" cy="9144000"/>
@@ -633,7 +636,7 @@
           <a:p>
             <a:fld id="{648FFCB5-3900-45AA-AD1D-F54FBD060154}" type="datetimeFigureOut">
               <a:rPr lang="en-US" smtClean="0"/>
-              <a:t>6/26/2023</a:t>
+              <a:t>10/14/2025</a:t>
             </a:fld>
             <a:endParaRPr lang="en-US"/>
           </a:p>
@@ -831,7 +834,7 @@
           <a:p>
             <a:fld id="{648FFCB5-3900-45AA-AD1D-F54FBD060154}" type="datetimeFigureOut">
               <a:rPr lang="en-US" smtClean="0"/>
-              <a:t>6/26/2023</a:t>
+              <a:t>10/14/2025</a:t>
             </a:fld>
             <a:endParaRPr lang="en-US"/>
           </a:p>
@@ -1039,7 +1042,7 @@
           <a:p>
             <a:fld id="{648FFCB5-3900-45AA-AD1D-F54FBD060154}" type="datetimeFigureOut">
               <a:rPr lang="en-US" smtClean="0"/>
-              <a:t>6/26/2023</a:t>
+              <a:t>10/14/2025</a:t>
             </a:fld>
             <a:endParaRPr lang="en-US"/>
           </a:p>
@@ -1237,7 +1240,7 @@
           <a:p>
             <a:fld id="{648FFCB5-3900-45AA-AD1D-F54FBD060154}" type="datetimeFigureOut">
               <a:rPr lang="en-US" smtClean="0"/>
-              <a:t>6/26/2023</a:t>
+              <a:t>10/14/2025</a:t>
             </a:fld>
             <a:endParaRPr lang="en-US"/>
           </a:p>
@@ -1512,7 +1515,7 @@
           <a:p>
             <a:fld id="{648FFCB5-3900-45AA-AD1D-F54FBD060154}" type="datetimeFigureOut">
               <a:rPr lang="en-US" smtClean="0"/>
-              <a:t>6/26/2023</a:t>
+              <a:t>10/14/2025</a:t>
             </a:fld>
             <a:endParaRPr lang="en-US"/>
           </a:p>
@@ -1777,7 +1780,7 @@
           <a:p>
             <a:fld id="{648FFCB5-3900-45AA-AD1D-F54FBD060154}" type="datetimeFigureOut">
               <a:rPr lang="en-US" smtClean="0"/>
-              <a:t>6/26/2023</a:t>
+              <a:t>10/14/2025</a:t>
             </a:fld>
             <a:endParaRPr lang="en-US"/>
           </a:p>
@@ -2189,7 +2192,7 @@
           <a:p>
             <a:fld id="{648FFCB5-3900-45AA-AD1D-F54FBD060154}" type="datetimeFigureOut">
               <a:rPr lang="en-US" smtClean="0"/>
-              <a:t>6/26/2023</a:t>
+              <a:t>10/14/2025</a:t>
             </a:fld>
             <a:endParaRPr lang="en-US"/>
           </a:p>
@@ -2330,7 +2333,7 @@
           <a:p>
             <a:fld id="{648FFCB5-3900-45AA-AD1D-F54FBD060154}" type="datetimeFigureOut">
               <a:rPr lang="en-US" smtClean="0"/>
-              <a:t>6/26/2023</a:t>
+              <a:t>10/14/2025</a:t>
             </a:fld>
             <a:endParaRPr lang="en-US"/>
           </a:p>
@@ -2443,7 +2446,7 @@
           <a:p>
             <a:fld id="{648FFCB5-3900-45AA-AD1D-F54FBD060154}" type="datetimeFigureOut">
               <a:rPr lang="en-US" smtClean="0"/>
-              <a:t>6/26/2023</a:t>
+              <a:t>10/14/2025</a:t>
             </a:fld>
             <a:endParaRPr lang="en-US"/>
           </a:p>
@@ -2754,7 +2757,7 @@
           <a:p>
             <a:fld id="{648FFCB5-3900-45AA-AD1D-F54FBD060154}" type="datetimeFigureOut">
               <a:rPr lang="en-US" smtClean="0"/>
-              <a:t>6/26/2023</a:t>
+              <a:t>10/14/2025</a:t>
             </a:fld>
             <a:endParaRPr lang="en-US"/>
           </a:p>
@@ -3042,7 +3045,7 @@
           <a:p>
             <a:fld id="{648FFCB5-3900-45AA-AD1D-F54FBD060154}" type="datetimeFigureOut">
               <a:rPr lang="en-US" smtClean="0"/>
-              <a:t>6/26/2023</a:t>
+              <a:t>10/14/2025</a:t>
             </a:fld>
             <a:endParaRPr lang="en-US"/>
           </a:p>
@@ -3283,7 +3286,7 @@
           <a:p>
             <a:fld id="{648FFCB5-3900-45AA-AD1D-F54FBD060154}" type="datetimeFigureOut">
               <a:rPr lang="en-US" smtClean="0"/>
-              <a:t>6/26/2023</a:t>
+              <a:t>10/14/2025</a:t>
             </a:fld>
             <a:endParaRPr lang="en-US"/>
           </a:p>
@@ -3723,7 +3726,7 @@
           <a:p>
             <a:r>
               <a:rPr lang="en-US" dirty="0"/>
-              <a:t>Macros 2</a:t>
+              <a:t>Macros 3</a:t>
             </a:r>
           </a:p>
         </p:txBody>
@@ -3767,6 +3770,648 @@
 </file>
 
 <file path=ppt/slides/slide10.xml><?xml version="1.0" encoding="utf-8"?>
+<p:sld xmlns:a="http://schemas.openxmlformats.org/drawingml/2006/main" xmlns:r="http://schemas.openxmlformats.org/officeDocument/2006/relationships" xmlns:p="http://schemas.openxmlformats.org/presentationml/2006/main">
+  <p:cSld>
+    <p:spTree>
+      <p:nvGrpSpPr>
+        <p:cNvPr id="1" name=""/>
+        <p:cNvGrpSpPr/>
+        <p:nvPr/>
+      </p:nvGrpSpPr>
+      <p:grpSpPr>
+        <a:xfrm>
+          <a:off x="0" y="0"/>
+          <a:ext cx="0" cy="0"/>
+          <a:chOff x="0" y="0"/>
+          <a:chExt cx="0" cy="0"/>
+        </a:xfrm>
+      </p:grpSpPr>
+      <p:sp>
+        <p:nvSpPr>
+          <p:cNvPr id="2" name="Title 1">
+            <a:extLst>
+              <a:ext uri="{FF2B5EF4-FFF2-40B4-BE49-F238E27FC236}">
+                <a16:creationId xmlns:a16="http://schemas.microsoft.com/office/drawing/2014/main" id="{D06AC56F-C6DC-44C4-BF01-68F0F145FAAA}"/>
+              </a:ext>
+            </a:extLst>
+          </p:cNvPr>
+          <p:cNvSpPr>
+            <a:spLocks noGrp="1"/>
+          </p:cNvSpPr>
+          <p:nvPr>
+            <p:ph type="title"/>
+          </p:nvPr>
+        </p:nvSpPr>
+        <p:spPr/>
+        <p:txBody>
+          <a:bodyPr/>
+          <a:lstStyle/>
+          <a:p>
+            <a:r>
+              <a:rPr lang="en-US" dirty="0"/>
+              <a:t>Sometimes we want to capture</a:t>
+            </a:r>
+          </a:p>
+        </p:txBody>
+      </p:sp>
+      <p:sp>
+        <p:nvSpPr>
+          <p:cNvPr id="3" name="Content Placeholder 2">
+            <a:extLst>
+              <a:ext uri="{FF2B5EF4-FFF2-40B4-BE49-F238E27FC236}">
+                <a16:creationId xmlns:a16="http://schemas.microsoft.com/office/drawing/2014/main" id="{DFFC10AC-A57A-435D-B74E-F6F5353DEFD1}"/>
+              </a:ext>
+            </a:extLst>
+          </p:cNvPr>
+          <p:cNvSpPr>
+            <a:spLocks noGrp="1"/>
+          </p:cNvSpPr>
+          <p:nvPr>
+            <p:ph idx="1"/>
+          </p:nvPr>
+        </p:nvSpPr>
+        <p:spPr>
+          <a:xfrm>
+            <a:off x="273132" y="1825625"/>
+            <a:ext cx="12029704" cy="4351338"/>
+          </a:xfrm>
+        </p:spPr>
+        <p:txBody>
+          <a:bodyPr>
+            <a:normAutofit/>
+          </a:bodyPr>
+          <a:lstStyle/>
+          <a:p>
+            <a:pPr marL="0" indent="0">
+              <a:buNone/>
+            </a:pPr>
+            <a:r>
+              <a:rPr lang="en-US" sz="2400" dirty="0">
+                <a:latin typeface="Consolas" panose="020B0609020204030204" pitchFamily="49" charset="0"/>
+              </a:rPr>
+              <a:t>(define-syntax print-x</a:t>
+            </a:r>
+          </a:p>
+          <a:p>
+            <a:pPr marL="0" indent="0">
+              <a:buNone/>
+            </a:pPr>
+            <a:r>
+              <a:rPr lang="en-US" sz="2400" dirty="0">
+                <a:latin typeface="Consolas" panose="020B0609020204030204" pitchFamily="49" charset="0"/>
+              </a:rPr>
+              <a:t>  (lambda (</a:t>
+            </a:r>
+            <a:r>
+              <a:rPr lang="en-US" sz="2400" dirty="0" err="1">
+                <a:latin typeface="Consolas" panose="020B0609020204030204" pitchFamily="49" charset="0"/>
+              </a:rPr>
+              <a:t>stx</a:t>
+            </a:r>
+            <a:r>
+              <a:rPr lang="en-US" sz="2400" dirty="0">
+                <a:latin typeface="Consolas" panose="020B0609020204030204" pitchFamily="49" charset="0"/>
+              </a:rPr>
+              <a:t>)</a:t>
+            </a:r>
+          </a:p>
+          <a:p>
+            <a:pPr marL="0" indent="0">
+              <a:buNone/>
+            </a:pPr>
+            <a:r>
+              <a:rPr lang="en-US" sz="2400" dirty="0">
+                <a:latin typeface="Consolas" panose="020B0609020204030204" pitchFamily="49" charset="0"/>
+              </a:rPr>
+              <a:t>    (syntax-case </a:t>
+            </a:r>
+            <a:r>
+              <a:rPr lang="en-US" sz="2400" dirty="0" err="1">
+                <a:latin typeface="Consolas" panose="020B0609020204030204" pitchFamily="49" charset="0"/>
+              </a:rPr>
+              <a:t>stx</a:t>
+            </a:r>
+            <a:r>
+              <a:rPr lang="en-US" sz="2400" dirty="0">
+                <a:latin typeface="Consolas" panose="020B0609020204030204" pitchFamily="49" charset="0"/>
+              </a:rPr>
+              <a:t> ()</a:t>
+            </a:r>
+          </a:p>
+          <a:p>
+            <a:pPr marL="0" indent="0">
+              <a:buNone/>
+            </a:pPr>
+            <a:r>
+              <a:rPr lang="en-US" sz="2400" dirty="0">
+                <a:latin typeface="Consolas" panose="020B0609020204030204" pitchFamily="49" charset="0"/>
+              </a:rPr>
+              <a:t>      [(print-x) (with-syntax ([x-in-context (datum-&gt;syntax </a:t>
+            </a:r>
+            <a:r>
+              <a:rPr lang="en-US" sz="2400" dirty="0" err="1">
+                <a:latin typeface="Consolas" panose="020B0609020204030204" pitchFamily="49" charset="0"/>
+              </a:rPr>
+              <a:t>stx</a:t>
+            </a:r>
+            <a:r>
+              <a:rPr lang="en-US" sz="2400" dirty="0">
+                <a:latin typeface="Consolas" panose="020B0609020204030204" pitchFamily="49" charset="0"/>
+              </a:rPr>
+              <a:t> 'x)])</a:t>
+            </a:r>
+          </a:p>
+          <a:p>
+            <a:pPr marL="0" indent="0">
+              <a:buNone/>
+            </a:pPr>
+            <a:r>
+              <a:rPr lang="en-US" sz="2400" dirty="0">
+                <a:latin typeface="Consolas" panose="020B0609020204030204" pitchFamily="49" charset="0"/>
+              </a:rPr>
+              <a:t>                   #'(</a:t>
+            </a:r>
+            <a:r>
+              <a:rPr lang="en-US" sz="2400" dirty="0" err="1">
+                <a:latin typeface="Consolas" panose="020B0609020204030204" pitchFamily="49" charset="0"/>
+              </a:rPr>
+              <a:t>printf</a:t>
+            </a:r>
+            <a:r>
+              <a:rPr lang="en-US" sz="2400" dirty="0">
+                <a:latin typeface="Consolas" panose="020B0609020204030204" pitchFamily="49" charset="0"/>
+              </a:rPr>
+              <a:t> "x is ~</a:t>
+            </a:r>
+            <a:r>
+              <a:rPr lang="en-US" sz="2400" dirty="0" err="1">
+                <a:latin typeface="Consolas" panose="020B0609020204030204" pitchFamily="49" charset="0"/>
+              </a:rPr>
+              <a:t>s~n</a:t>
+            </a:r>
+            <a:r>
+              <a:rPr lang="en-US" sz="2400" dirty="0">
+                <a:latin typeface="Consolas" panose="020B0609020204030204" pitchFamily="49" charset="0"/>
+              </a:rPr>
+              <a:t>" x-in-context))])))</a:t>
+            </a:r>
+          </a:p>
+          <a:p>
+            <a:pPr marL="0" indent="0">
+              <a:buNone/>
+            </a:pPr>
+            <a:endParaRPr lang="en-US" sz="2400" dirty="0">
+              <a:latin typeface="Consolas" panose="020B0609020204030204" pitchFamily="49" charset="0"/>
+            </a:endParaRPr>
+          </a:p>
+          <a:p>
+            <a:pPr marL="0" indent="0">
+              <a:buNone/>
+            </a:pPr>
+            <a:r>
+              <a:rPr lang="en-US" sz="2400" dirty="0">
+                <a:latin typeface="Consolas" panose="020B0609020204030204" pitchFamily="49" charset="0"/>
+              </a:rPr>
+              <a:t>(let ((x 3)) (print-x))</a:t>
+            </a:r>
+          </a:p>
+        </p:txBody>
+      </p:sp>
+      <p:sp>
+        <p:nvSpPr>
+          <p:cNvPr id="4" name="Callout: Line 3">
+            <a:extLst>
+              <a:ext uri="{FF2B5EF4-FFF2-40B4-BE49-F238E27FC236}">
+                <a16:creationId xmlns:a16="http://schemas.microsoft.com/office/drawing/2014/main" id="{F4FC7380-7478-4DA7-8374-D304C7120702}"/>
+              </a:ext>
+            </a:extLst>
+          </p:cNvPr>
+          <p:cNvSpPr/>
+          <p:nvPr/>
+        </p:nvSpPr>
+        <p:spPr>
+          <a:xfrm>
+            <a:off x="8311676" y="1234609"/>
+            <a:ext cx="3368233" cy="1182032"/>
+          </a:xfrm>
+          <a:prstGeom prst="borderCallout1">
+            <a:avLst>
+              <a:gd name="adj1" fmla="val 101603"/>
+              <a:gd name="adj2" fmla="val 88726"/>
+              <a:gd name="adj3" fmla="val 169841"/>
+              <a:gd name="adj4" fmla="val 81853"/>
+            </a:avLst>
+          </a:prstGeom>
+          <a:solidFill>
+            <a:schemeClr val="accent1">
+              <a:lumMod val="20000"/>
+              <a:lumOff val="80000"/>
+            </a:schemeClr>
+          </a:solidFill>
+        </p:spPr>
+        <p:style>
+          <a:lnRef idx="2">
+            <a:schemeClr val="dk1"/>
+          </a:lnRef>
+          <a:fillRef idx="1">
+            <a:schemeClr val="lt1"/>
+          </a:fillRef>
+          <a:effectRef idx="0">
+            <a:schemeClr val="dk1"/>
+          </a:effectRef>
+          <a:fontRef idx="minor">
+            <a:schemeClr val="dk1"/>
+          </a:fontRef>
+        </p:style>
+        <p:txBody>
+          <a:bodyPr rtlCol="0" anchor="ctr"/>
+          <a:lstStyle/>
+          <a:p>
+            <a:pPr algn="ctr"/>
+            <a:r>
+              <a:rPr lang="en-US" dirty="0"/>
+              <a:t>Put in the namespace of the transformed code, not the generated code</a:t>
+            </a:r>
+          </a:p>
+        </p:txBody>
+      </p:sp>
+      <p:sp>
+        <p:nvSpPr>
+          <p:cNvPr id="5" name="Callout: Line 4">
+            <a:extLst>
+              <a:ext uri="{FF2B5EF4-FFF2-40B4-BE49-F238E27FC236}">
+                <a16:creationId xmlns:a16="http://schemas.microsoft.com/office/drawing/2014/main" id="{FC433F22-5895-475A-A36A-78C5CE827612}"/>
+              </a:ext>
+            </a:extLst>
+          </p:cNvPr>
+          <p:cNvSpPr/>
+          <p:nvPr/>
+        </p:nvSpPr>
+        <p:spPr>
+          <a:xfrm>
+            <a:off x="6627558" y="4772760"/>
+            <a:ext cx="4209317" cy="850631"/>
+          </a:xfrm>
+          <a:prstGeom prst="borderCallout1">
+            <a:avLst>
+              <a:gd name="adj1" fmla="val 201"/>
+              <a:gd name="adj2" fmla="val 21957"/>
+              <a:gd name="adj3" fmla="val -86522"/>
+              <a:gd name="adj4" fmla="val -44640"/>
+            </a:avLst>
+          </a:prstGeom>
+          <a:solidFill>
+            <a:schemeClr val="accent1">
+              <a:lumMod val="20000"/>
+              <a:lumOff val="80000"/>
+            </a:schemeClr>
+          </a:solidFill>
+        </p:spPr>
+        <p:style>
+          <a:lnRef idx="2">
+            <a:schemeClr val="dk1"/>
+          </a:lnRef>
+          <a:fillRef idx="1">
+            <a:schemeClr val="lt1"/>
+          </a:fillRef>
+          <a:effectRef idx="0">
+            <a:schemeClr val="dk1"/>
+          </a:effectRef>
+          <a:fontRef idx="minor">
+            <a:schemeClr val="dk1"/>
+          </a:fontRef>
+        </p:style>
+        <p:txBody>
+          <a:bodyPr rtlCol="0" anchor="ctr"/>
+          <a:lstStyle/>
+          <a:p>
+            <a:pPr algn="ctr"/>
+            <a:r>
+              <a:rPr lang="en-US" dirty="0"/>
+              <a:t>Other values not specially constructed however, are still safe from capture</a:t>
+            </a:r>
+          </a:p>
+        </p:txBody>
+      </p:sp>
+    </p:spTree>
+    <p:extLst>
+      <p:ext uri="{BB962C8B-B14F-4D97-AF65-F5344CB8AC3E}">
+        <p14:creationId xmlns:p14="http://schemas.microsoft.com/office/powerpoint/2010/main" val="4014141333"/>
+      </p:ext>
+    </p:extLst>
+  </p:cSld>
+  <p:clrMapOvr>
+    <a:masterClrMapping/>
+  </p:clrMapOvr>
+</p:sld>
+</file>
+
+<file path=ppt/slides/slide11.xml><?xml version="1.0" encoding="utf-8"?>
+<p:sld xmlns:a="http://schemas.openxmlformats.org/drawingml/2006/main" xmlns:r="http://schemas.openxmlformats.org/officeDocument/2006/relationships" xmlns:p="http://schemas.openxmlformats.org/presentationml/2006/main">
+  <p:cSld>
+    <p:spTree>
+      <p:nvGrpSpPr>
+        <p:cNvPr id="1" name=""/>
+        <p:cNvGrpSpPr/>
+        <p:nvPr/>
+      </p:nvGrpSpPr>
+      <p:grpSpPr>
+        <a:xfrm>
+          <a:off x="0" y="0"/>
+          <a:ext cx="0" cy="0"/>
+          <a:chOff x="0" y="0"/>
+          <a:chExt cx="0" cy="0"/>
+        </a:xfrm>
+      </p:grpSpPr>
+      <p:sp>
+        <p:nvSpPr>
+          <p:cNvPr id="2" name="Title 1">
+            <a:extLst>
+              <a:ext uri="{FF2B5EF4-FFF2-40B4-BE49-F238E27FC236}">
+                <a16:creationId xmlns:a16="http://schemas.microsoft.com/office/drawing/2014/main" id="{6AB62B88-2902-4412-BBDD-876C3337B320}"/>
+              </a:ext>
+            </a:extLst>
+          </p:cNvPr>
+          <p:cNvSpPr>
+            <a:spLocks noGrp="1"/>
+          </p:cNvSpPr>
+          <p:nvPr>
+            <p:ph type="title"/>
+          </p:nvPr>
+        </p:nvSpPr>
+        <p:spPr/>
+        <p:txBody>
+          <a:bodyPr/>
+          <a:lstStyle/>
+          <a:p>
+            <a:r>
+              <a:rPr lang="en-US" dirty="0"/>
+              <a:t>Activity if-it</a:t>
+            </a:r>
+          </a:p>
+        </p:txBody>
+      </p:sp>
+      <p:sp>
+        <p:nvSpPr>
+          <p:cNvPr id="3" name="Content Placeholder 2">
+            <a:extLst>
+              <a:ext uri="{FF2B5EF4-FFF2-40B4-BE49-F238E27FC236}">
+                <a16:creationId xmlns:a16="http://schemas.microsoft.com/office/drawing/2014/main" id="{0028535B-BBC3-4547-8508-DF51D52C1C72}"/>
+              </a:ext>
+            </a:extLst>
+          </p:cNvPr>
+          <p:cNvSpPr>
+            <a:spLocks noGrp="1"/>
+          </p:cNvSpPr>
+          <p:nvPr>
+            <p:ph idx="1"/>
+          </p:nvPr>
+        </p:nvSpPr>
+        <p:spPr>
+          <a:xfrm>
+            <a:off x="0" y="1564368"/>
+            <a:ext cx="11709070" cy="4351338"/>
+          </a:xfrm>
+        </p:spPr>
+        <p:txBody>
+          <a:bodyPr/>
+          <a:lstStyle/>
+          <a:p>
+            <a:pPr marL="0" indent="0">
+              <a:spcAft>
+                <a:spcPts val="600"/>
+              </a:spcAft>
+              <a:buNone/>
+            </a:pPr>
+            <a:r>
+              <a:rPr lang="en-US" dirty="0"/>
+              <a:t>Sometimes we want to use the value of an if test</a:t>
+            </a:r>
+          </a:p>
+          <a:p>
+            <a:pPr marL="0" indent="0">
+              <a:spcAft>
+                <a:spcPts val="600"/>
+              </a:spcAft>
+              <a:buNone/>
+            </a:pPr>
+            <a:r>
+              <a:rPr lang="en-US" sz="2400" dirty="0">
+                <a:latin typeface="Consolas" panose="020B0609020204030204" pitchFamily="49" charset="0"/>
+              </a:rPr>
+              <a:t>(if (do-big-calculation 100) (+ 1 (do-big-calculation 100)) #failed)</a:t>
+            </a:r>
+          </a:p>
+          <a:p>
+            <a:pPr marL="0" indent="0">
+              <a:spcAft>
+                <a:spcPts val="600"/>
+              </a:spcAft>
+              <a:buNone/>
+            </a:pPr>
+            <a:r>
+              <a:rPr lang="en-US" sz="2400" dirty="0"/>
+              <a:t>What if we had a variant of if that bound the test to a variable “it”.  The equivalent of:</a:t>
+            </a:r>
+          </a:p>
+          <a:p>
+            <a:pPr marL="0" indent="0">
+              <a:spcAft>
+                <a:spcPts val="600"/>
+              </a:spcAft>
+              <a:buNone/>
+            </a:pPr>
+            <a:r>
+              <a:rPr lang="en-US" sz="2400" dirty="0">
+                <a:latin typeface="Consolas" panose="020B0609020204030204" pitchFamily="49" charset="0"/>
+              </a:rPr>
+              <a:t>(let ((it (do-big-calculation 100)) (if it (+ 1 it) #failed))</a:t>
+            </a:r>
+          </a:p>
+          <a:p>
+            <a:pPr marL="0" indent="0">
+              <a:spcAft>
+                <a:spcPts val="600"/>
+              </a:spcAft>
+              <a:buNone/>
+            </a:pPr>
+            <a:r>
+              <a:rPr lang="en-US" sz="2400" dirty="0"/>
+              <a:t>But without having to explicitly do the let</a:t>
+            </a:r>
+          </a:p>
+          <a:p>
+            <a:pPr marL="0" indent="0">
+              <a:spcAft>
+                <a:spcPts val="600"/>
+              </a:spcAft>
+              <a:buNone/>
+            </a:pPr>
+            <a:r>
+              <a:rPr lang="en-US" sz="2400" dirty="0">
+                <a:latin typeface="Consolas" panose="020B0609020204030204" pitchFamily="49" charset="0"/>
+              </a:rPr>
+              <a:t>(if (do-big-calculation 100) (+ 1 it) #failed)</a:t>
+            </a:r>
+          </a:p>
+          <a:p>
+            <a:pPr marL="0" indent="0">
+              <a:spcAft>
+                <a:spcPts val="600"/>
+              </a:spcAft>
+              <a:buNone/>
+            </a:pPr>
+            <a:r>
+              <a:rPr lang="en-US" sz="2400" dirty="0"/>
+              <a:t>Hint: You’ll want to define it similar to the way we did x in the example.</a:t>
+            </a:r>
+          </a:p>
+          <a:p>
+            <a:pPr marL="0" indent="0">
+              <a:spcAft>
+                <a:spcPts val="600"/>
+              </a:spcAft>
+              <a:buNone/>
+            </a:pPr>
+            <a:endParaRPr lang="en-US" sz="2400" dirty="0"/>
+          </a:p>
+          <a:p>
+            <a:pPr marL="0" indent="0">
+              <a:spcAft>
+                <a:spcPts val="600"/>
+              </a:spcAft>
+              <a:buNone/>
+            </a:pPr>
+            <a:endParaRPr lang="en-US" sz="2400" dirty="0">
+              <a:latin typeface="Consolas" panose="020B0609020204030204" pitchFamily="49" charset="0"/>
+            </a:endParaRPr>
+          </a:p>
+          <a:p>
+            <a:pPr marL="0" indent="0">
+              <a:spcAft>
+                <a:spcPts val="600"/>
+              </a:spcAft>
+              <a:buNone/>
+            </a:pPr>
+            <a:endParaRPr lang="en-US" sz="2400" dirty="0">
+              <a:latin typeface="Consolas" panose="020B0609020204030204" pitchFamily="49" charset="0"/>
+            </a:endParaRPr>
+          </a:p>
+          <a:p>
+            <a:pPr marL="0" indent="0">
+              <a:spcAft>
+                <a:spcPts val="600"/>
+              </a:spcAft>
+              <a:buNone/>
+            </a:pPr>
+            <a:endParaRPr lang="en-US" sz="2400" dirty="0">
+              <a:latin typeface="Consolas" panose="020B0609020204030204" pitchFamily="49" charset="0"/>
+            </a:endParaRPr>
+          </a:p>
+        </p:txBody>
+      </p:sp>
+    </p:spTree>
+    <p:extLst>
+      <p:ext uri="{BB962C8B-B14F-4D97-AF65-F5344CB8AC3E}">
+        <p14:creationId xmlns:p14="http://schemas.microsoft.com/office/powerpoint/2010/main" val="3290595372"/>
+      </p:ext>
+    </p:extLst>
+  </p:cSld>
+  <p:clrMapOvr>
+    <a:masterClrMapping/>
+  </p:clrMapOvr>
+</p:sld>
+</file>
+
+<file path=ppt/slides/slide12.xml><?xml version="1.0" encoding="utf-8"?>
+<p:sld xmlns:a="http://schemas.openxmlformats.org/drawingml/2006/main" xmlns:r="http://schemas.openxmlformats.org/officeDocument/2006/relationships" xmlns:p="http://schemas.openxmlformats.org/presentationml/2006/main">
+  <p:cSld>
+    <p:spTree>
+      <p:nvGrpSpPr>
+        <p:cNvPr id="1" name=""/>
+        <p:cNvGrpSpPr/>
+        <p:nvPr/>
+      </p:nvGrpSpPr>
+      <p:grpSpPr>
+        <a:xfrm>
+          <a:off x="0" y="0"/>
+          <a:ext cx="0" cy="0"/>
+          <a:chOff x="0" y="0"/>
+          <a:chExt cx="0" cy="0"/>
+        </a:xfrm>
+      </p:grpSpPr>
+      <p:sp>
+        <p:nvSpPr>
+          <p:cNvPr id="2" name="Title 1">
+            <a:extLst>
+              <a:ext uri="{FF2B5EF4-FFF2-40B4-BE49-F238E27FC236}">
+                <a16:creationId xmlns:a16="http://schemas.microsoft.com/office/drawing/2014/main" id="{748FC9B3-6B91-4C04-80E7-363D1288C3C6}"/>
+              </a:ext>
+            </a:extLst>
+          </p:cNvPr>
+          <p:cNvSpPr>
+            <a:spLocks noGrp="1"/>
+          </p:cNvSpPr>
+          <p:nvPr>
+            <p:ph type="title"/>
+          </p:nvPr>
+        </p:nvSpPr>
+        <p:spPr/>
+        <p:txBody>
+          <a:bodyPr/>
+          <a:lstStyle/>
+          <a:p>
+            <a:r>
+              <a:rPr lang="en-US" dirty="0"/>
+              <a:t>Macro Expansion occurs before execution</a:t>
+            </a:r>
+          </a:p>
+        </p:txBody>
+      </p:sp>
+      <p:pic>
+        <p:nvPicPr>
+          <p:cNvPr id="5" name="Picture 4">
+            <a:extLst>
+              <a:ext uri="{FF2B5EF4-FFF2-40B4-BE49-F238E27FC236}">
+                <a16:creationId xmlns:a16="http://schemas.microsoft.com/office/drawing/2014/main" id="{F081C50D-AB49-4C64-A716-9209DB3BA6E7}"/>
+              </a:ext>
+            </a:extLst>
+          </p:cNvPr>
+          <p:cNvPicPr>
+            <a:picLocks noChangeAspect="1"/>
+          </p:cNvPicPr>
+          <p:nvPr/>
+        </p:nvPicPr>
+        <p:blipFill>
+          <a:blip r:embed="rId2"/>
+          <a:stretch>
+            <a:fillRect/>
+          </a:stretch>
+        </p:blipFill>
+        <p:spPr>
+          <a:xfrm>
+            <a:off x="1498524" y="1377236"/>
+            <a:ext cx="9459645" cy="5115639"/>
+          </a:xfrm>
+          <a:prstGeom prst="rect">
+            <a:avLst/>
+          </a:prstGeom>
+        </p:spPr>
+      </p:pic>
+    </p:spTree>
+    <p:extLst>
+      <p:ext uri="{BB962C8B-B14F-4D97-AF65-F5344CB8AC3E}">
+        <p14:creationId xmlns:p14="http://schemas.microsoft.com/office/powerpoint/2010/main" val="4163544457"/>
+      </p:ext>
+    </p:extLst>
+  </p:cSld>
+  <p:clrMapOvr>
+    <a:masterClrMapping/>
+  </p:clrMapOvr>
+</p:sld>
+</file>
+
+<file path=ppt/slides/slide13.xml><?xml version="1.0" encoding="utf-8"?>
 <p:sld xmlns:a="http://schemas.openxmlformats.org/drawingml/2006/main" xmlns:r="http://schemas.openxmlformats.org/officeDocument/2006/relationships" xmlns:p="http://schemas.openxmlformats.org/presentationml/2006/main">
   <p:cSld>
     <p:spTree>
@@ -3880,7 +4525,7 @@
 </p:sld>
 </file>
 
-<file path=ppt/slides/slide11.xml><?xml version="1.0" encoding="utf-8"?>
+<file path=ppt/slides/slide14.xml><?xml version="1.0" encoding="utf-8"?>
 <p:sld xmlns:a="http://schemas.openxmlformats.org/drawingml/2006/main" xmlns:r="http://schemas.openxmlformats.org/officeDocument/2006/relationships" xmlns:p="http://schemas.openxmlformats.org/presentationml/2006/main">
   <p:cSld>
     <p:spTree>
@@ -4136,7 +4781,7 @@
 </p:sld>
 </file>
 
-<file path=ppt/slides/slide12.xml><?xml version="1.0" encoding="utf-8"?>
+<file path=ppt/slides/slide15.xml><?xml version="1.0" encoding="utf-8"?>
 <p:sld xmlns:a="http://schemas.openxmlformats.org/drawingml/2006/main" xmlns:r="http://schemas.openxmlformats.org/officeDocument/2006/relationships" xmlns:p="http://schemas.openxmlformats.org/presentationml/2006/main">
   <p:cSld>
     <p:spTree>
@@ -4711,7 +5356,7 @@
           <p:cNvPr id="2" name="Title 1">
             <a:extLst>
               <a:ext uri="{FF2B5EF4-FFF2-40B4-BE49-F238E27FC236}">
-                <a16:creationId xmlns:a16="http://schemas.microsoft.com/office/drawing/2014/main" id="{75F3D548-3E64-4CD6-BBE2-E8AB594A3236}"/>
+                <a16:creationId xmlns:a16="http://schemas.microsoft.com/office/drawing/2014/main" id="{2D6981A2-33DA-93C0-E2AA-E0BC67E7EB60}"/>
               </a:ext>
             </a:extLst>
           </p:cNvPr>
@@ -4722,19 +5367,14 @@
             <p:ph type="title"/>
           </p:nvPr>
         </p:nvSpPr>
-        <p:spPr>
-          <a:xfrm>
-            <a:off x="838200" y="249379"/>
-            <a:ext cx="10515600" cy="792343"/>
-          </a:xfrm>
-        </p:spPr>
+        <p:spPr/>
         <p:txBody>
           <a:bodyPr/>
           <a:lstStyle/>
           <a:p>
             <a:r>
               <a:rPr lang="en-US" dirty="0"/>
-              <a:t>Variable Capture Problems</a:t>
+              <a:t>Languages and Transformations</a:t>
             </a:r>
           </a:p>
         </p:txBody>
@@ -4744,7 +5384,7 @@
           <p:cNvPr id="3" name="Content Placeholder 2">
             <a:extLst>
               <a:ext uri="{FF2B5EF4-FFF2-40B4-BE49-F238E27FC236}">
-                <a16:creationId xmlns:a16="http://schemas.microsoft.com/office/drawing/2014/main" id="{84391CD8-05AB-4B2E-BD40-A2E3D48D0286}"/>
+                <a16:creationId xmlns:a16="http://schemas.microsoft.com/office/drawing/2014/main" id="{65FF81F6-406D-293F-E68D-0CB2294085C5}"/>
               </a:ext>
             </a:extLst>
           </p:cNvPr>
@@ -4755,365 +5395,60 @@
             <p:ph idx="1"/>
           </p:nvPr>
         </p:nvSpPr>
-        <p:spPr>
-          <a:xfrm>
-            <a:off x="838200" y="1157468"/>
-            <a:ext cx="10515600" cy="5602147"/>
-          </a:xfrm>
-        </p:spPr>
-        <p:txBody>
-          <a:bodyPr>
-            <a:normAutofit/>
-          </a:bodyPr>
-          <a:lstStyle/>
-          <a:p>
-            <a:pPr marL="0" indent="0">
-              <a:buNone/>
-            </a:pPr>
-            <a:r>
-              <a:rPr lang="en-US" sz="1600" dirty="0">
-                <a:latin typeface="Consolas" panose="020B0609020204030204" pitchFamily="49" charset="0"/>
-              </a:rPr>
-              <a:t>(define-syntax </a:t>
-            </a:r>
-            <a:r>
-              <a:rPr lang="en-US" sz="1600" dirty="0" err="1">
-                <a:latin typeface="Consolas" panose="020B0609020204030204" pitchFamily="49" charset="0"/>
-              </a:rPr>
-              <a:t>badswap</a:t>
-            </a:r>
-            <a:endParaRPr lang="en-US" sz="1600" dirty="0">
-              <a:latin typeface="Consolas" panose="020B0609020204030204" pitchFamily="49" charset="0"/>
-            </a:endParaRPr>
-          </a:p>
-          <a:p>
-            <a:pPr marL="0" indent="0">
-              <a:buNone/>
-            </a:pPr>
-            <a:r>
-              <a:rPr lang="en-US" sz="1600" dirty="0">
-                <a:latin typeface="Consolas" panose="020B0609020204030204" pitchFamily="49" charset="0"/>
-              </a:rPr>
-              <a:t>  (lambda (</a:t>
-            </a:r>
-            <a:r>
-              <a:rPr lang="en-US" sz="1600" dirty="0" err="1">
-                <a:latin typeface="Consolas" panose="020B0609020204030204" pitchFamily="49" charset="0"/>
-              </a:rPr>
-              <a:t>stx</a:t>
-            </a:r>
-            <a:r>
-              <a:rPr lang="en-US" sz="1600" dirty="0">
-                <a:latin typeface="Consolas" panose="020B0609020204030204" pitchFamily="49" charset="0"/>
-              </a:rPr>
-              <a:t>)</a:t>
-            </a:r>
-          </a:p>
-          <a:p>
-            <a:pPr marL="0" indent="0">
-              <a:buNone/>
-            </a:pPr>
-            <a:r>
-              <a:rPr lang="en-US" sz="1600" dirty="0">
-                <a:latin typeface="Consolas" panose="020B0609020204030204" pitchFamily="49" charset="0"/>
-              </a:rPr>
-              <a:t>    (datum-&gt;syntax </a:t>
-            </a:r>
-            <a:r>
-              <a:rPr lang="en-US" sz="1600" dirty="0" err="1">
-                <a:latin typeface="Consolas" panose="020B0609020204030204" pitchFamily="49" charset="0"/>
-              </a:rPr>
-              <a:t>stx</a:t>
-            </a:r>
-            <a:r>
-              <a:rPr lang="en-US" sz="1600" dirty="0">
-                <a:latin typeface="Consolas" panose="020B0609020204030204" pitchFamily="49" charset="0"/>
-              </a:rPr>
-              <a:t> (let* ([</a:t>
-            </a:r>
-            <a:r>
-              <a:rPr lang="en-US" sz="1600" dirty="0" err="1">
-                <a:latin typeface="Consolas" panose="020B0609020204030204" pitchFamily="49" charset="0"/>
-              </a:rPr>
-              <a:t>orig</a:t>
-            </a:r>
-            <a:r>
-              <a:rPr lang="en-US" sz="1600" dirty="0">
-                <a:latin typeface="Consolas" panose="020B0609020204030204" pitchFamily="49" charset="0"/>
-              </a:rPr>
-              <a:t> (syntax-&gt;datum </a:t>
-            </a:r>
-            <a:r>
-              <a:rPr lang="en-US" sz="1600" dirty="0" err="1">
-                <a:latin typeface="Consolas" panose="020B0609020204030204" pitchFamily="49" charset="0"/>
-              </a:rPr>
-              <a:t>stx</a:t>
-            </a:r>
-            <a:r>
-              <a:rPr lang="en-US" sz="1600" dirty="0">
-                <a:latin typeface="Consolas" panose="020B0609020204030204" pitchFamily="49" charset="0"/>
-              </a:rPr>
-              <a:t>)]</a:t>
-            </a:r>
-          </a:p>
-          <a:p>
-            <a:pPr marL="0" indent="0">
-              <a:buNone/>
-            </a:pPr>
-            <a:r>
-              <a:rPr lang="en-US" sz="1600" dirty="0">
-                <a:latin typeface="Consolas" panose="020B0609020204030204" pitchFamily="49" charset="0"/>
-              </a:rPr>
-              <a:t>                              [v1 (</a:t>
-            </a:r>
-            <a:r>
-              <a:rPr lang="en-US" sz="1600" dirty="0" err="1">
-                <a:latin typeface="Consolas" panose="020B0609020204030204" pitchFamily="49" charset="0"/>
-              </a:rPr>
-              <a:t>cadr</a:t>
-            </a:r>
-            <a:r>
-              <a:rPr lang="en-US" sz="1600" dirty="0">
-                <a:latin typeface="Consolas" panose="020B0609020204030204" pitchFamily="49" charset="0"/>
-              </a:rPr>
-              <a:t> </a:t>
-            </a:r>
-            <a:r>
-              <a:rPr lang="en-US" sz="1600" dirty="0" err="1">
-                <a:latin typeface="Consolas" panose="020B0609020204030204" pitchFamily="49" charset="0"/>
-              </a:rPr>
-              <a:t>orig</a:t>
-            </a:r>
-            <a:r>
-              <a:rPr lang="en-US" sz="1600" dirty="0">
-                <a:latin typeface="Consolas" panose="020B0609020204030204" pitchFamily="49" charset="0"/>
-              </a:rPr>
-              <a:t>)]</a:t>
-            </a:r>
-          </a:p>
-          <a:p>
-            <a:pPr marL="0" indent="0">
-              <a:buNone/>
-            </a:pPr>
-            <a:r>
-              <a:rPr lang="en-US" sz="1600" dirty="0">
-                <a:latin typeface="Consolas" panose="020B0609020204030204" pitchFamily="49" charset="0"/>
-              </a:rPr>
-              <a:t>                              [v2 (</a:t>
-            </a:r>
-            <a:r>
-              <a:rPr lang="en-US" sz="1600" dirty="0" err="1">
-                <a:latin typeface="Consolas" panose="020B0609020204030204" pitchFamily="49" charset="0"/>
-              </a:rPr>
-              <a:t>caddr</a:t>
-            </a:r>
-            <a:r>
-              <a:rPr lang="en-US" sz="1600" dirty="0">
-                <a:latin typeface="Consolas" panose="020B0609020204030204" pitchFamily="49" charset="0"/>
-              </a:rPr>
-              <a:t> </a:t>
-            </a:r>
-            <a:r>
-              <a:rPr lang="en-US" sz="1600" dirty="0" err="1">
-                <a:latin typeface="Consolas" panose="020B0609020204030204" pitchFamily="49" charset="0"/>
-              </a:rPr>
-              <a:t>orig</a:t>
-            </a:r>
-            <a:r>
-              <a:rPr lang="en-US" sz="1600" dirty="0">
-                <a:latin typeface="Consolas" panose="020B0609020204030204" pitchFamily="49" charset="0"/>
-              </a:rPr>
-              <a:t>)])</a:t>
-            </a:r>
-          </a:p>
-          <a:p>
-            <a:pPr marL="0" indent="0">
-              <a:buNone/>
-            </a:pPr>
-            <a:r>
-              <a:rPr lang="en-US" sz="1600" dirty="0">
-                <a:latin typeface="Consolas" panose="020B0609020204030204" pitchFamily="49" charset="0"/>
-              </a:rPr>
-              <a:t>                         (list 'let (list (list '</a:t>
-            </a:r>
-            <a:r>
-              <a:rPr lang="en-US" sz="1600" dirty="0" err="1">
-                <a:latin typeface="Consolas" panose="020B0609020204030204" pitchFamily="49" charset="0"/>
-              </a:rPr>
-              <a:t>tmp</a:t>
-            </a:r>
-            <a:r>
-              <a:rPr lang="en-US" sz="1600" dirty="0">
-                <a:latin typeface="Consolas" panose="020B0609020204030204" pitchFamily="49" charset="0"/>
-              </a:rPr>
-              <a:t> v1))</a:t>
-            </a:r>
-          </a:p>
-          <a:p>
-            <a:pPr marL="0" indent="0">
-              <a:buNone/>
-            </a:pPr>
-            <a:r>
-              <a:rPr lang="en-US" sz="1600" dirty="0">
-                <a:latin typeface="Consolas" panose="020B0609020204030204" pitchFamily="49" charset="0"/>
-              </a:rPr>
-              <a:t>                               (list 'set! v1 v2)</a:t>
-            </a:r>
-          </a:p>
-          <a:p>
-            <a:pPr marL="0" indent="0">
-              <a:buNone/>
-            </a:pPr>
-            <a:r>
-              <a:rPr lang="en-US" sz="1600" dirty="0">
-                <a:latin typeface="Consolas" panose="020B0609020204030204" pitchFamily="49" charset="0"/>
-              </a:rPr>
-              <a:t>                               (list 'set! v2 '</a:t>
-            </a:r>
-            <a:r>
-              <a:rPr lang="en-US" sz="1600" dirty="0" err="1">
-                <a:latin typeface="Consolas" panose="020B0609020204030204" pitchFamily="49" charset="0"/>
-              </a:rPr>
-              <a:t>tmp</a:t>
-            </a:r>
-            <a:r>
-              <a:rPr lang="en-US" sz="1600" dirty="0">
-                <a:latin typeface="Consolas" panose="020B0609020204030204" pitchFamily="49" charset="0"/>
-              </a:rPr>
-              <a:t>))))))</a:t>
-            </a:r>
-          </a:p>
-          <a:p>
-            <a:pPr marL="0" indent="0">
-              <a:buNone/>
-            </a:pPr>
-            <a:r>
-              <a:rPr lang="en-US" sz="1600" dirty="0">
-                <a:latin typeface="Consolas" panose="020B0609020204030204" pitchFamily="49" charset="0"/>
-              </a:rPr>
-              <a:t>      </a:t>
-            </a:r>
-          </a:p>
-          <a:p>
-            <a:pPr marL="0" indent="0">
-              <a:buNone/>
-            </a:pPr>
-            <a:endParaRPr lang="en-US" sz="1600" dirty="0">
-              <a:latin typeface="Consolas" panose="020B0609020204030204" pitchFamily="49" charset="0"/>
-            </a:endParaRPr>
-          </a:p>
-          <a:p>
-            <a:pPr marL="0" indent="0">
-              <a:buNone/>
-            </a:pPr>
-            <a:r>
-              <a:rPr lang="en-US" sz="1600" dirty="0">
-                <a:latin typeface="Consolas" panose="020B0609020204030204" pitchFamily="49" charset="0"/>
-              </a:rPr>
-              <a:t>(define a 1)</a:t>
-            </a:r>
-          </a:p>
-          <a:p>
-            <a:pPr marL="0" indent="0">
-              <a:buNone/>
-            </a:pPr>
-            <a:r>
-              <a:rPr lang="en-US" sz="1600" dirty="0">
-                <a:latin typeface="Consolas" panose="020B0609020204030204" pitchFamily="49" charset="0"/>
-              </a:rPr>
-              <a:t>(define b 2)</a:t>
-            </a:r>
-          </a:p>
-          <a:p>
-            <a:pPr marL="0" indent="0">
-              <a:buNone/>
-            </a:pPr>
-            <a:r>
-              <a:rPr lang="en-US" sz="1600" dirty="0">
-                <a:latin typeface="Consolas" panose="020B0609020204030204" pitchFamily="49" charset="0"/>
-              </a:rPr>
-              <a:t>(</a:t>
-            </a:r>
-            <a:r>
-              <a:rPr lang="en-US" sz="1600" dirty="0" err="1">
-                <a:latin typeface="Consolas" panose="020B0609020204030204" pitchFamily="49" charset="0"/>
-              </a:rPr>
-              <a:t>badswap</a:t>
-            </a:r>
-            <a:r>
-              <a:rPr lang="en-US" sz="1600" dirty="0">
-                <a:latin typeface="Consolas" panose="020B0609020204030204" pitchFamily="49" charset="0"/>
-              </a:rPr>
-              <a:t> a b) ; works</a:t>
-            </a:r>
-          </a:p>
-          <a:p>
-            <a:pPr marL="0" indent="0">
-              <a:buNone/>
-            </a:pPr>
-            <a:r>
-              <a:rPr lang="en-US" sz="1600" dirty="0">
-                <a:latin typeface="Consolas" panose="020B0609020204030204" pitchFamily="49" charset="0"/>
-              </a:rPr>
-              <a:t>(define q 3)</a:t>
-            </a:r>
-          </a:p>
-          <a:p>
-            <a:pPr marL="0" indent="0">
-              <a:buNone/>
-            </a:pPr>
-            <a:r>
-              <a:rPr lang="en-US" sz="1600" dirty="0">
-                <a:latin typeface="Consolas" panose="020B0609020204030204" pitchFamily="49" charset="0"/>
-              </a:rPr>
-              <a:t>(define </a:t>
-            </a:r>
-            <a:r>
-              <a:rPr lang="en-US" sz="1600" dirty="0" err="1">
-                <a:latin typeface="Consolas" panose="020B0609020204030204" pitchFamily="49" charset="0"/>
-              </a:rPr>
-              <a:t>tmp</a:t>
-            </a:r>
-            <a:r>
-              <a:rPr lang="en-US" sz="1600" dirty="0">
-                <a:latin typeface="Consolas" panose="020B0609020204030204" pitchFamily="49" charset="0"/>
-              </a:rPr>
-              <a:t> 99)</a:t>
-            </a:r>
-          </a:p>
-          <a:p>
-            <a:pPr marL="0" indent="0">
-              <a:buNone/>
-            </a:pPr>
-            <a:r>
-              <a:rPr lang="en-US" sz="1600" dirty="0">
-                <a:latin typeface="Consolas" panose="020B0609020204030204" pitchFamily="49" charset="0"/>
-              </a:rPr>
-              <a:t>(</a:t>
-            </a:r>
-            <a:r>
-              <a:rPr lang="en-US" sz="1600" dirty="0" err="1">
-                <a:latin typeface="Consolas" panose="020B0609020204030204" pitchFamily="49" charset="0"/>
-              </a:rPr>
-              <a:t>badswap</a:t>
-            </a:r>
-            <a:r>
-              <a:rPr lang="en-US" sz="1600" dirty="0">
-                <a:latin typeface="Consolas" panose="020B0609020204030204" pitchFamily="49" charset="0"/>
-              </a:rPr>
-              <a:t> q </a:t>
-            </a:r>
-            <a:r>
-              <a:rPr lang="en-US" sz="1600" dirty="0" err="1">
-                <a:latin typeface="Consolas" panose="020B0609020204030204" pitchFamily="49" charset="0"/>
-              </a:rPr>
-              <a:t>tmp</a:t>
-            </a:r>
-            <a:r>
-              <a:rPr lang="en-US" sz="1600" dirty="0">
-                <a:latin typeface="Consolas" panose="020B0609020204030204" pitchFamily="49" charset="0"/>
-              </a:rPr>
-              <a:t>) ; variables are not swapped</a:t>
+        <p:spPr/>
+        <p:txBody>
+          <a:bodyPr/>
+          <a:lstStyle/>
+          <a:p>
+            <a:r>
+              <a:rPr lang="en-US" dirty="0"/>
+              <a:t>Oftentimes you need to take “code like” stuff out of code e.g.</a:t>
+            </a:r>
+          </a:p>
+          <a:p>
+            <a:pPr lvl="1"/>
+            <a:r>
+              <a:rPr lang="en-US" dirty="0"/>
+              <a:t>The database you’re going to connect to</a:t>
+            </a:r>
+          </a:p>
+          <a:p>
+            <a:pPr lvl="1"/>
+            <a:r>
+              <a:rPr lang="en-US" dirty="0"/>
+              <a:t>The path a particular bad guy moves in for your video game</a:t>
+            </a:r>
+          </a:p>
+          <a:p>
+            <a:r>
+              <a:rPr lang="en-US" dirty="0"/>
+              <a:t>It’s DATA but the problem is that this kind of data quickly becomes extremely complex (e.g. big nasty JSON blobs)</a:t>
+            </a:r>
+          </a:p>
+          <a:p>
+            <a:pPr lvl="1"/>
+            <a:r>
+              <a:rPr lang="en-US" dirty="0"/>
+              <a:t>It has very minimal validation</a:t>
+            </a:r>
+          </a:p>
+          <a:p>
+            <a:pPr lvl="1"/>
+            <a:r>
+              <a:rPr lang="en-US" dirty="0"/>
+              <a:t>Adding new features is immensely cumbersome</a:t>
+            </a:r>
+          </a:p>
+          <a:p>
+            <a:r>
+              <a:rPr lang="en-US" dirty="0"/>
+              <a:t>You can *make* it a language (these are often called DSLs – domain specific languages)</a:t>
+            </a:r>
+          </a:p>
+          <a:p>
+            <a:r>
+              <a:rPr lang="en-US" dirty="0"/>
+              <a:t>But usually the better move is to make the language code itself</a:t>
             </a:r>
           </a:p>
         </p:txBody>
@@ -5121,7 +5456,7 @@
     </p:spTree>
     <p:extLst>
       <p:ext uri="{BB962C8B-B14F-4D97-AF65-F5344CB8AC3E}">
-        <p14:creationId xmlns:p14="http://schemas.microsoft.com/office/powerpoint/2010/main" val="3608643309"/>
+        <p14:creationId xmlns:p14="http://schemas.microsoft.com/office/powerpoint/2010/main" val="1536211482"/>
       </p:ext>
     </p:extLst>
   </p:cSld>
@@ -5153,6 +5488,780 @@
           <p:cNvPr id="2" name="Title 1">
             <a:extLst>
               <a:ext uri="{FF2B5EF4-FFF2-40B4-BE49-F238E27FC236}">
+                <a16:creationId xmlns:a16="http://schemas.microsoft.com/office/drawing/2014/main" id="{955491AE-23FB-5493-22B9-7C44D7CD18AF}"/>
+              </a:ext>
+            </a:extLst>
+          </p:cNvPr>
+          <p:cNvSpPr>
+            <a:spLocks noGrp="1"/>
+          </p:cNvSpPr>
+          <p:nvPr>
+            <p:ph type="title"/>
+          </p:nvPr>
+        </p:nvSpPr>
+        <p:spPr/>
+        <p:txBody>
+          <a:bodyPr/>
+          <a:lstStyle/>
+          <a:p>
+            <a:endParaRPr lang="en-US" dirty="0"/>
+          </a:p>
+        </p:txBody>
+      </p:sp>
+      <p:sp>
+        <p:nvSpPr>
+          <p:cNvPr id="3" name="Content Placeholder 2">
+            <a:extLst>
+              <a:ext uri="{FF2B5EF4-FFF2-40B4-BE49-F238E27FC236}">
+                <a16:creationId xmlns:a16="http://schemas.microsoft.com/office/drawing/2014/main" id="{018175B0-AF86-E614-A3AB-E89C69A1FA39}"/>
+              </a:ext>
+            </a:extLst>
+          </p:cNvPr>
+          <p:cNvSpPr>
+            <a:spLocks noGrp="1"/>
+          </p:cNvSpPr>
+          <p:nvPr>
+            <p:ph idx="1"/>
+          </p:nvPr>
+        </p:nvSpPr>
+        <p:spPr/>
+        <p:txBody>
+          <a:bodyPr>
+            <a:normAutofit fontScale="92500" lnSpcReduction="20000"/>
+          </a:bodyPr>
+          <a:lstStyle/>
+          <a:p>
+            <a:pPr marL="0" indent="0">
+              <a:buNone/>
+            </a:pPr>
+            <a:r>
+              <a:rPr lang="en-US" dirty="0"/>
+              <a:t>Class </a:t>
+            </a:r>
+            <a:r>
+              <a:rPr lang="en-US" dirty="0" err="1"/>
+              <a:t>DatabaseConfig</a:t>
+            </a:r>
+            <a:r>
+              <a:rPr lang="en-US" dirty="0"/>
+              <a:t> {</a:t>
+            </a:r>
+          </a:p>
+          <a:p>
+            <a:pPr marL="0" indent="0">
+              <a:buNone/>
+            </a:pPr>
+            <a:r>
+              <a:rPr lang="en-US" dirty="0"/>
+              <a:t>…</a:t>
+            </a:r>
+          </a:p>
+          <a:p>
+            <a:pPr marL="0" indent="0">
+              <a:buNone/>
+            </a:pPr>
+            <a:r>
+              <a:rPr lang="en-US" dirty="0"/>
+              <a:t>}</a:t>
+            </a:r>
+          </a:p>
+          <a:p>
+            <a:pPr marL="0" indent="0">
+              <a:buNone/>
+            </a:pPr>
+            <a:endParaRPr lang="en-US" dirty="0"/>
+          </a:p>
+          <a:p>
+            <a:pPr marL="0" indent="0">
+              <a:buNone/>
+            </a:pPr>
+            <a:r>
+              <a:rPr lang="en-US" dirty="0" err="1"/>
+              <a:t>prodDbConfig</a:t>
+            </a:r>
+            <a:r>
+              <a:rPr lang="en-US" dirty="0"/>
+              <a:t> = new </a:t>
+            </a:r>
+            <a:r>
+              <a:rPr lang="en-US" dirty="0" err="1"/>
+              <a:t>DatabaseConfig</a:t>
+            </a:r>
+            <a:r>
+              <a:rPr lang="en-US" dirty="0"/>
+              <a:t>();</a:t>
+            </a:r>
+          </a:p>
+          <a:p>
+            <a:pPr marL="0" indent="0">
+              <a:buNone/>
+            </a:pPr>
+            <a:r>
+              <a:rPr lang="en-US" dirty="0" err="1"/>
+              <a:t>prodDBConfig.setServer</a:t>
+            </a:r>
+            <a:r>
+              <a:rPr lang="en-US" dirty="0"/>
+              <a:t>(“</a:t>
+            </a:r>
+            <a:r>
+              <a:rPr lang="en-US" dirty="0" err="1"/>
+              <a:t>NorthAmerica</a:t>
+            </a:r>
+            <a:r>
+              <a:rPr lang="en-US" dirty="0"/>
+              <a:t>”, “db.na-prod”)</a:t>
+            </a:r>
+          </a:p>
+          <a:p>
+            <a:pPr marL="0" indent="0">
+              <a:buNone/>
+            </a:pPr>
+            <a:r>
+              <a:rPr lang="en-US" dirty="0" err="1"/>
+              <a:t>prodDBConfig.setServer</a:t>
+            </a:r>
+            <a:r>
+              <a:rPr lang="en-US" dirty="0"/>
+              <a:t>(“Asia”, “</a:t>
+            </a:r>
+            <a:r>
+              <a:rPr lang="en-US" dirty="0" err="1"/>
+              <a:t>db.a</a:t>
+            </a:r>
+            <a:r>
+              <a:rPr lang="en-US" dirty="0"/>
+              <a:t>-prod”)</a:t>
+            </a:r>
+          </a:p>
+          <a:p>
+            <a:pPr marL="0" indent="0">
+              <a:buNone/>
+            </a:pPr>
+            <a:r>
+              <a:rPr lang="en-US" dirty="0"/>
+              <a:t>If(</a:t>
+            </a:r>
+            <a:r>
+              <a:rPr lang="en-US" dirty="0" err="1"/>
+              <a:t>myConfig.dbMigrationFlag</a:t>
+            </a:r>
+            <a:r>
+              <a:rPr lang="en-US" dirty="0"/>
+              <a:t>) {</a:t>
+            </a:r>
+          </a:p>
+          <a:p>
+            <a:pPr marL="0" indent="0">
+              <a:buNone/>
+            </a:pPr>
+            <a:r>
+              <a:rPr lang="en-US" dirty="0"/>
+              <a:t>	</a:t>
+            </a:r>
+            <a:r>
+              <a:rPr lang="en-US" dirty="0" err="1"/>
+              <a:t>prodDBConfig.setServer</a:t>
+            </a:r>
+            <a:r>
+              <a:rPr lang="en-US" dirty="0"/>
+              <a:t>(“</a:t>
+            </a:r>
+            <a:r>
+              <a:rPr lang="en-US" dirty="0" err="1"/>
+              <a:t>NorthAmerica</a:t>
+            </a:r>
+            <a:r>
+              <a:rPr lang="en-US" dirty="0"/>
+              <a:t>”, “db.na-prod2”)</a:t>
+            </a:r>
+          </a:p>
+          <a:p>
+            <a:pPr marL="0" indent="0">
+              <a:buNone/>
+            </a:pPr>
+            <a:r>
+              <a:rPr lang="en-US" dirty="0"/>
+              <a:t>}</a:t>
+            </a:r>
+          </a:p>
+          <a:p>
+            <a:pPr marL="0" indent="0">
+              <a:buNone/>
+            </a:pPr>
+            <a:endParaRPr lang="en-US" dirty="0"/>
+          </a:p>
+        </p:txBody>
+      </p:sp>
+    </p:spTree>
+    <p:extLst>
+      <p:ext uri="{BB962C8B-B14F-4D97-AF65-F5344CB8AC3E}">
+        <p14:creationId xmlns:p14="http://schemas.microsoft.com/office/powerpoint/2010/main" val="809600635"/>
+      </p:ext>
+    </p:extLst>
+  </p:cSld>
+  <p:clrMapOvr>
+    <a:masterClrMapping/>
+  </p:clrMapOvr>
+</p:sld>
+</file>
+
+<file path=ppt/slides/slide6.xml><?xml version="1.0" encoding="utf-8"?>
+<p:sld xmlns:a="http://schemas.openxmlformats.org/drawingml/2006/main" xmlns:r="http://schemas.openxmlformats.org/officeDocument/2006/relationships" xmlns:p="http://schemas.openxmlformats.org/presentationml/2006/main">
+  <p:cSld>
+    <p:spTree>
+      <p:nvGrpSpPr>
+        <p:cNvPr id="1" name=""/>
+        <p:cNvGrpSpPr/>
+        <p:nvPr/>
+      </p:nvGrpSpPr>
+      <p:grpSpPr>
+        <a:xfrm>
+          <a:off x="0" y="0"/>
+          <a:ext cx="0" cy="0"/>
+          <a:chOff x="0" y="0"/>
+          <a:chExt cx="0" cy="0"/>
+        </a:xfrm>
+      </p:grpSpPr>
+      <p:sp>
+        <p:nvSpPr>
+          <p:cNvPr id="2" name="Title 1">
+            <a:extLst>
+              <a:ext uri="{FF2B5EF4-FFF2-40B4-BE49-F238E27FC236}">
+                <a16:creationId xmlns:a16="http://schemas.microsoft.com/office/drawing/2014/main" id="{C6620D40-B6DC-FA39-2E27-4C4EF76EB5BB}"/>
+              </a:ext>
+            </a:extLst>
+          </p:cNvPr>
+          <p:cNvSpPr>
+            <a:spLocks noGrp="1"/>
+          </p:cNvSpPr>
+          <p:nvPr>
+            <p:ph type="title"/>
+          </p:nvPr>
+        </p:nvSpPr>
+        <p:spPr/>
+        <p:txBody>
+          <a:bodyPr/>
+          <a:lstStyle/>
+          <a:p>
+            <a:r>
+              <a:rPr lang="en-US" dirty="0"/>
+              <a:t>The problems</a:t>
+            </a:r>
+          </a:p>
+        </p:txBody>
+      </p:sp>
+      <p:sp>
+        <p:nvSpPr>
+          <p:cNvPr id="3" name="Content Placeholder 2">
+            <a:extLst>
+              <a:ext uri="{FF2B5EF4-FFF2-40B4-BE49-F238E27FC236}">
+                <a16:creationId xmlns:a16="http://schemas.microsoft.com/office/drawing/2014/main" id="{727A6328-5D22-FEE8-18AB-7A8BF1658CF7}"/>
+              </a:ext>
+            </a:extLst>
+          </p:cNvPr>
+          <p:cNvSpPr>
+            <a:spLocks noGrp="1"/>
+          </p:cNvSpPr>
+          <p:nvPr>
+            <p:ph idx="1"/>
+          </p:nvPr>
+        </p:nvSpPr>
+        <p:spPr/>
+        <p:txBody>
+          <a:bodyPr/>
+          <a:lstStyle/>
+          <a:p>
+            <a:r>
+              <a:rPr lang="en-US" dirty="0"/>
+              <a:t>If this code runs at the same time as your regular code, you frequently lose the benefit of anticipating problems</a:t>
+            </a:r>
+          </a:p>
+          <a:p>
+            <a:r>
+              <a:rPr lang="en-US" dirty="0"/>
+              <a:t>It looks ugly</a:t>
+            </a:r>
+          </a:p>
+        </p:txBody>
+      </p:sp>
+    </p:spTree>
+    <p:extLst>
+      <p:ext uri="{BB962C8B-B14F-4D97-AF65-F5344CB8AC3E}">
+        <p14:creationId xmlns:p14="http://schemas.microsoft.com/office/powerpoint/2010/main" val="3822497095"/>
+      </p:ext>
+    </p:extLst>
+  </p:cSld>
+  <p:clrMapOvr>
+    <a:masterClrMapping/>
+  </p:clrMapOvr>
+</p:sld>
+</file>
+
+<file path=ppt/slides/slide7.xml><?xml version="1.0" encoding="utf-8"?>
+<p:sld xmlns:a="http://schemas.openxmlformats.org/drawingml/2006/main" xmlns:r="http://schemas.openxmlformats.org/officeDocument/2006/relationships" xmlns:p="http://schemas.openxmlformats.org/presentationml/2006/main">
+  <p:cSld>
+    <p:spTree>
+      <p:nvGrpSpPr>
+        <p:cNvPr id="1" name=""/>
+        <p:cNvGrpSpPr/>
+        <p:nvPr/>
+      </p:nvGrpSpPr>
+      <p:grpSpPr>
+        <a:xfrm>
+          <a:off x="0" y="0"/>
+          <a:ext cx="0" cy="0"/>
+          <a:chOff x="0" y="0"/>
+          <a:chExt cx="0" cy="0"/>
+        </a:xfrm>
+      </p:grpSpPr>
+      <p:sp>
+        <p:nvSpPr>
+          <p:cNvPr id="2" name="Title 1">
+            <a:extLst>
+              <a:ext uri="{FF2B5EF4-FFF2-40B4-BE49-F238E27FC236}">
+                <a16:creationId xmlns:a16="http://schemas.microsoft.com/office/drawing/2014/main" id="{75F3D548-3E64-4CD6-BBE2-E8AB594A3236}"/>
+              </a:ext>
+            </a:extLst>
+          </p:cNvPr>
+          <p:cNvSpPr>
+            <a:spLocks noGrp="1"/>
+          </p:cNvSpPr>
+          <p:nvPr>
+            <p:ph type="title"/>
+          </p:nvPr>
+        </p:nvSpPr>
+        <p:spPr>
+          <a:xfrm>
+            <a:off x="838200" y="249379"/>
+            <a:ext cx="10515600" cy="792343"/>
+          </a:xfrm>
+        </p:spPr>
+        <p:txBody>
+          <a:bodyPr/>
+          <a:lstStyle/>
+          <a:p>
+            <a:r>
+              <a:rPr lang="en-US" dirty="0"/>
+              <a:t>Variable Capture Problems</a:t>
+            </a:r>
+          </a:p>
+        </p:txBody>
+      </p:sp>
+      <p:sp>
+        <p:nvSpPr>
+          <p:cNvPr id="3" name="Content Placeholder 2">
+            <a:extLst>
+              <a:ext uri="{FF2B5EF4-FFF2-40B4-BE49-F238E27FC236}">
+                <a16:creationId xmlns:a16="http://schemas.microsoft.com/office/drawing/2014/main" id="{84391CD8-05AB-4B2E-BD40-A2E3D48D0286}"/>
+              </a:ext>
+            </a:extLst>
+          </p:cNvPr>
+          <p:cNvSpPr>
+            <a:spLocks noGrp="1"/>
+          </p:cNvSpPr>
+          <p:nvPr>
+            <p:ph idx="1"/>
+          </p:nvPr>
+        </p:nvSpPr>
+        <p:spPr>
+          <a:xfrm>
+            <a:off x="838200" y="1157468"/>
+            <a:ext cx="10515600" cy="5602147"/>
+          </a:xfrm>
+        </p:spPr>
+        <p:txBody>
+          <a:bodyPr>
+            <a:normAutofit/>
+          </a:bodyPr>
+          <a:lstStyle/>
+          <a:p>
+            <a:pPr marL="0" indent="0">
+              <a:buNone/>
+            </a:pPr>
+            <a:r>
+              <a:rPr lang="en-US" sz="1600" dirty="0">
+                <a:latin typeface="Consolas" panose="020B0609020204030204" pitchFamily="49" charset="0"/>
+              </a:rPr>
+              <a:t>(define-syntax </a:t>
+            </a:r>
+            <a:r>
+              <a:rPr lang="en-US" sz="1600" dirty="0" err="1">
+                <a:latin typeface="Consolas" panose="020B0609020204030204" pitchFamily="49" charset="0"/>
+              </a:rPr>
+              <a:t>badswap</a:t>
+            </a:r>
+            <a:endParaRPr lang="en-US" sz="1600" dirty="0">
+              <a:latin typeface="Consolas" panose="020B0609020204030204" pitchFamily="49" charset="0"/>
+            </a:endParaRPr>
+          </a:p>
+          <a:p>
+            <a:pPr marL="0" indent="0">
+              <a:buNone/>
+            </a:pPr>
+            <a:r>
+              <a:rPr lang="en-US" sz="1600" dirty="0">
+                <a:latin typeface="Consolas" panose="020B0609020204030204" pitchFamily="49" charset="0"/>
+              </a:rPr>
+              <a:t>  (lambda (</a:t>
+            </a:r>
+            <a:r>
+              <a:rPr lang="en-US" sz="1600" dirty="0" err="1">
+                <a:latin typeface="Consolas" panose="020B0609020204030204" pitchFamily="49" charset="0"/>
+              </a:rPr>
+              <a:t>stx</a:t>
+            </a:r>
+            <a:r>
+              <a:rPr lang="en-US" sz="1600" dirty="0">
+                <a:latin typeface="Consolas" panose="020B0609020204030204" pitchFamily="49" charset="0"/>
+              </a:rPr>
+              <a:t>)</a:t>
+            </a:r>
+          </a:p>
+          <a:p>
+            <a:pPr marL="0" indent="0">
+              <a:buNone/>
+            </a:pPr>
+            <a:r>
+              <a:rPr lang="en-US" sz="1600" dirty="0">
+                <a:latin typeface="Consolas" panose="020B0609020204030204" pitchFamily="49" charset="0"/>
+              </a:rPr>
+              <a:t>    (datum-&gt;syntax </a:t>
+            </a:r>
+            <a:r>
+              <a:rPr lang="en-US" sz="1600" dirty="0" err="1">
+                <a:latin typeface="Consolas" panose="020B0609020204030204" pitchFamily="49" charset="0"/>
+              </a:rPr>
+              <a:t>stx</a:t>
+            </a:r>
+            <a:r>
+              <a:rPr lang="en-US" sz="1600" dirty="0">
+                <a:latin typeface="Consolas" panose="020B0609020204030204" pitchFamily="49" charset="0"/>
+              </a:rPr>
+              <a:t> (let* ([</a:t>
+            </a:r>
+            <a:r>
+              <a:rPr lang="en-US" sz="1600" dirty="0" err="1">
+                <a:latin typeface="Consolas" panose="020B0609020204030204" pitchFamily="49" charset="0"/>
+              </a:rPr>
+              <a:t>orig</a:t>
+            </a:r>
+            <a:r>
+              <a:rPr lang="en-US" sz="1600" dirty="0">
+                <a:latin typeface="Consolas" panose="020B0609020204030204" pitchFamily="49" charset="0"/>
+              </a:rPr>
+              <a:t> (syntax-&gt;datum </a:t>
+            </a:r>
+            <a:r>
+              <a:rPr lang="en-US" sz="1600" dirty="0" err="1">
+                <a:latin typeface="Consolas" panose="020B0609020204030204" pitchFamily="49" charset="0"/>
+              </a:rPr>
+              <a:t>stx</a:t>
+            </a:r>
+            <a:r>
+              <a:rPr lang="en-US" sz="1600" dirty="0">
+                <a:latin typeface="Consolas" panose="020B0609020204030204" pitchFamily="49" charset="0"/>
+              </a:rPr>
+              <a:t>)]</a:t>
+            </a:r>
+          </a:p>
+          <a:p>
+            <a:pPr marL="0" indent="0">
+              <a:buNone/>
+            </a:pPr>
+            <a:r>
+              <a:rPr lang="en-US" sz="1600" dirty="0">
+                <a:latin typeface="Consolas" panose="020B0609020204030204" pitchFamily="49" charset="0"/>
+              </a:rPr>
+              <a:t>                              [v1 (</a:t>
+            </a:r>
+            <a:r>
+              <a:rPr lang="en-US" sz="1600" dirty="0" err="1">
+                <a:latin typeface="Consolas" panose="020B0609020204030204" pitchFamily="49" charset="0"/>
+              </a:rPr>
+              <a:t>cadr</a:t>
+            </a:r>
+            <a:r>
+              <a:rPr lang="en-US" sz="1600" dirty="0">
+                <a:latin typeface="Consolas" panose="020B0609020204030204" pitchFamily="49" charset="0"/>
+              </a:rPr>
+              <a:t> </a:t>
+            </a:r>
+            <a:r>
+              <a:rPr lang="en-US" sz="1600" dirty="0" err="1">
+                <a:latin typeface="Consolas" panose="020B0609020204030204" pitchFamily="49" charset="0"/>
+              </a:rPr>
+              <a:t>orig</a:t>
+            </a:r>
+            <a:r>
+              <a:rPr lang="en-US" sz="1600" dirty="0">
+                <a:latin typeface="Consolas" panose="020B0609020204030204" pitchFamily="49" charset="0"/>
+              </a:rPr>
+              <a:t>)]</a:t>
+            </a:r>
+          </a:p>
+          <a:p>
+            <a:pPr marL="0" indent="0">
+              <a:buNone/>
+            </a:pPr>
+            <a:r>
+              <a:rPr lang="en-US" sz="1600" dirty="0">
+                <a:latin typeface="Consolas" panose="020B0609020204030204" pitchFamily="49" charset="0"/>
+              </a:rPr>
+              <a:t>                              [v2 (</a:t>
+            </a:r>
+            <a:r>
+              <a:rPr lang="en-US" sz="1600" dirty="0" err="1">
+                <a:latin typeface="Consolas" panose="020B0609020204030204" pitchFamily="49" charset="0"/>
+              </a:rPr>
+              <a:t>caddr</a:t>
+            </a:r>
+            <a:r>
+              <a:rPr lang="en-US" sz="1600" dirty="0">
+                <a:latin typeface="Consolas" panose="020B0609020204030204" pitchFamily="49" charset="0"/>
+              </a:rPr>
+              <a:t> </a:t>
+            </a:r>
+            <a:r>
+              <a:rPr lang="en-US" sz="1600" dirty="0" err="1">
+                <a:latin typeface="Consolas" panose="020B0609020204030204" pitchFamily="49" charset="0"/>
+              </a:rPr>
+              <a:t>orig</a:t>
+            </a:r>
+            <a:r>
+              <a:rPr lang="en-US" sz="1600" dirty="0">
+                <a:latin typeface="Consolas" panose="020B0609020204030204" pitchFamily="49" charset="0"/>
+              </a:rPr>
+              <a:t>)])</a:t>
+            </a:r>
+          </a:p>
+          <a:p>
+            <a:pPr marL="0" indent="0">
+              <a:buNone/>
+            </a:pPr>
+            <a:r>
+              <a:rPr lang="en-US" sz="1600" dirty="0">
+                <a:latin typeface="Consolas" panose="020B0609020204030204" pitchFamily="49" charset="0"/>
+              </a:rPr>
+              <a:t>                         (list 'let (list (list '</a:t>
+            </a:r>
+            <a:r>
+              <a:rPr lang="en-US" sz="1600" dirty="0" err="1">
+                <a:latin typeface="Consolas" panose="020B0609020204030204" pitchFamily="49" charset="0"/>
+              </a:rPr>
+              <a:t>tmp</a:t>
+            </a:r>
+            <a:r>
+              <a:rPr lang="en-US" sz="1600" dirty="0">
+                <a:latin typeface="Consolas" panose="020B0609020204030204" pitchFamily="49" charset="0"/>
+              </a:rPr>
+              <a:t> v1))</a:t>
+            </a:r>
+          </a:p>
+          <a:p>
+            <a:pPr marL="0" indent="0">
+              <a:buNone/>
+            </a:pPr>
+            <a:r>
+              <a:rPr lang="en-US" sz="1600" dirty="0">
+                <a:latin typeface="Consolas" panose="020B0609020204030204" pitchFamily="49" charset="0"/>
+              </a:rPr>
+              <a:t>                               (list 'set! v1 v2)</a:t>
+            </a:r>
+          </a:p>
+          <a:p>
+            <a:pPr marL="0" indent="0">
+              <a:buNone/>
+            </a:pPr>
+            <a:r>
+              <a:rPr lang="en-US" sz="1600" dirty="0">
+                <a:latin typeface="Consolas" panose="020B0609020204030204" pitchFamily="49" charset="0"/>
+              </a:rPr>
+              <a:t>                               (list 'set! v2 '</a:t>
+            </a:r>
+            <a:r>
+              <a:rPr lang="en-US" sz="1600" dirty="0" err="1">
+                <a:latin typeface="Consolas" panose="020B0609020204030204" pitchFamily="49" charset="0"/>
+              </a:rPr>
+              <a:t>tmp</a:t>
+            </a:r>
+            <a:r>
+              <a:rPr lang="en-US" sz="1600" dirty="0">
+                <a:latin typeface="Consolas" panose="020B0609020204030204" pitchFamily="49" charset="0"/>
+              </a:rPr>
+              <a:t>))))))</a:t>
+            </a:r>
+          </a:p>
+          <a:p>
+            <a:pPr marL="0" indent="0">
+              <a:buNone/>
+            </a:pPr>
+            <a:r>
+              <a:rPr lang="en-US" sz="1600" dirty="0">
+                <a:latin typeface="Consolas" panose="020B0609020204030204" pitchFamily="49" charset="0"/>
+              </a:rPr>
+              <a:t>      </a:t>
+            </a:r>
+          </a:p>
+          <a:p>
+            <a:pPr marL="0" indent="0">
+              <a:buNone/>
+            </a:pPr>
+            <a:endParaRPr lang="en-US" sz="1600" dirty="0">
+              <a:latin typeface="Consolas" panose="020B0609020204030204" pitchFamily="49" charset="0"/>
+            </a:endParaRPr>
+          </a:p>
+          <a:p>
+            <a:pPr marL="0" indent="0">
+              <a:buNone/>
+            </a:pPr>
+            <a:r>
+              <a:rPr lang="en-US" sz="1600" dirty="0">
+                <a:latin typeface="Consolas" panose="020B0609020204030204" pitchFamily="49" charset="0"/>
+              </a:rPr>
+              <a:t>(define a 1)</a:t>
+            </a:r>
+          </a:p>
+          <a:p>
+            <a:pPr marL="0" indent="0">
+              <a:buNone/>
+            </a:pPr>
+            <a:r>
+              <a:rPr lang="en-US" sz="1600" dirty="0">
+                <a:latin typeface="Consolas" panose="020B0609020204030204" pitchFamily="49" charset="0"/>
+              </a:rPr>
+              <a:t>(define b 2)</a:t>
+            </a:r>
+          </a:p>
+          <a:p>
+            <a:pPr marL="0" indent="0">
+              <a:buNone/>
+            </a:pPr>
+            <a:r>
+              <a:rPr lang="en-US" sz="1600" dirty="0">
+                <a:latin typeface="Consolas" panose="020B0609020204030204" pitchFamily="49" charset="0"/>
+              </a:rPr>
+              <a:t>(</a:t>
+            </a:r>
+            <a:r>
+              <a:rPr lang="en-US" sz="1600" dirty="0" err="1">
+                <a:latin typeface="Consolas" panose="020B0609020204030204" pitchFamily="49" charset="0"/>
+              </a:rPr>
+              <a:t>badswap</a:t>
+            </a:r>
+            <a:r>
+              <a:rPr lang="en-US" sz="1600" dirty="0">
+                <a:latin typeface="Consolas" panose="020B0609020204030204" pitchFamily="49" charset="0"/>
+              </a:rPr>
+              <a:t> a b) ; works</a:t>
+            </a:r>
+          </a:p>
+          <a:p>
+            <a:pPr marL="0" indent="0">
+              <a:buNone/>
+            </a:pPr>
+            <a:r>
+              <a:rPr lang="en-US" sz="1600" dirty="0">
+                <a:latin typeface="Consolas" panose="020B0609020204030204" pitchFamily="49" charset="0"/>
+              </a:rPr>
+              <a:t>(define q 3)</a:t>
+            </a:r>
+          </a:p>
+          <a:p>
+            <a:pPr marL="0" indent="0">
+              <a:buNone/>
+            </a:pPr>
+            <a:r>
+              <a:rPr lang="en-US" sz="1600" dirty="0">
+                <a:latin typeface="Consolas" panose="020B0609020204030204" pitchFamily="49" charset="0"/>
+              </a:rPr>
+              <a:t>(define </a:t>
+            </a:r>
+            <a:r>
+              <a:rPr lang="en-US" sz="1600" dirty="0" err="1">
+                <a:latin typeface="Consolas" panose="020B0609020204030204" pitchFamily="49" charset="0"/>
+              </a:rPr>
+              <a:t>tmp</a:t>
+            </a:r>
+            <a:r>
+              <a:rPr lang="en-US" sz="1600" dirty="0">
+                <a:latin typeface="Consolas" panose="020B0609020204030204" pitchFamily="49" charset="0"/>
+              </a:rPr>
+              <a:t> 99)</a:t>
+            </a:r>
+          </a:p>
+          <a:p>
+            <a:pPr marL="0" indent="0">
+              <a:buNone/>
+            </a:pPr>
+            <a:r>
+              <a:rPr lang="en-US" sz="1600" dirty="0">
+                <a:latin typeface="Consolas" panose="020B0609020204030204" pitchFamily="49" charset="0"/>
+              </a:rPr>
+              <a:t>(</a:t>
+            </a:r>
+            <a:r>
+              <a:rPr lang="en-US" sz="1600" dirty="0" err="1">
+                <a:latin typeface="Consolas" panose="020B0609020204030204" pitchFamily="49" charset="0"/>
+              </a:rPr>
+              <a:t>badswap</a:t>
+            </a:r>
+            <a:r>
+              <a:rPr lang="en-US" sz="1600" dirty="0">
+                <a:latin typeface="Consolas" panose="020B0609020204030204" pitchFamily="49" charset="0"/>
+              </a:rPr>
+              <a:t> q </a:t>
+            </a:r>
+            <a:r>
+              <a:rPr lang="en-US" sz="1600" dirty="0" err="1">
+                <a:latin typeface="Consolas" panose="020B0609020204030204" pitchFamily="49" charset="0"/>
+              </a:rPr>
+              <a:t>tmp</a:t>
+            </a:r>
+            <a:r>
+              <a:rPr lang="en-US" sz="1600" dirty="0">
+                <a:latin typeface="Consolas" panose="020B0609020204030204" pitchFamily="49" charset="0"/>
+              </a:rPr>
+              <a:t>) ; variables are not swapped</a:t>
+            </a:r>
+          </a:p>
+        </p:txBody>
+      </p:sp>
+    </p:spTree>
+    <p:extLst>
+      <p:ext uri="{BB962C8B-B14F-4D97-AF65-F5344CB8AC3E}">
+        <p14:creationId xmlns:p14="http://schemas.microsoft.com/office/powerpoint/2010/main" val="3608643309"/>
+      </p:ext>
+    </p:extLst>
+  </p:cSld>
+  <p:clrMapOvr>
+    <a:masterClrMapping/>
+  </p:clrMapOvr>
+</p:sld>
+</file>
+
+<file path=ppt/slides/slide8.xml><?xml version="1.0" encoding="utf-8"?>
+<p:sld xmlns:a="http://schemas.openxmlformats.org/drawingml/2006/main" xmlns:r="http://schemas.openxmlformats.org/officeDocument/2006/relationships" xmlns:p="http://schemas.openxmlformats.org/presentationml/2006/main">
+  <p:cSld>
+    <p:spTree>
+      <p:nvGrpSpPr>
+        <p:cNvPr id="1" name=""/>
+        <p:cNvGrpSpPr/>
+        <p:nvPr/>
+      </p:nvGrpSpPr>
+      <p:grpSpPr>
+        <a:xfrm>
+          <a:off x="0" y="0"/>
+          <a:ext cx="0" cy="0"/>
+          <a:chOff x="0" y="0"/>
+          <a:chExt cx="0" cy="0"/>
+        </a:xfrm>
+      </p:grpSpPr>
+      <p:sp>
+        <p:nvSpPr>
+          <p:cNvPr id="2" name="Title 1">
+            <a:extLst>
+              <a:ext uri="{FF2B5EF4-FFF2-40B4-BE49-F238E27FC236}">
                 <a16:creationId xmlns:a16="http://schemas.microsoft.com/office/drawing/2014/main" id="{3AF57412-F958-44E1-BD9C-13649DD46B23}"/>
               </a:ext>
             </a:extLst>
@@ -5277,7 +6386,7 @@
 </p:sld>
 </file>
 
-<file path=ppt/slides/slide6.xml><?xml version="1.0" encoding="utf-8"?>
+<file path=ppt/slides/slide9.xml><?xml version="1.0" encoding="utf-8"?>
 <p:sld xmlns:a="http://schemas.openxmlformats.org/drawingml/2006/main" xmlns:r="http://schemas.openxmlformats.org/officeDocument/2006/relationships" xmlns:p="http://schemas.openxmlformats.org/presentationml/2006/main">
   <p:cSld>
     <p:spTree>
@@ -5634,648 +6743,6 @@
     <p:extLst>
       <p:ext uri="{BB962C8B-B14F-4D97-AF65-F5344CB8AC3E}">
         <p14:creationId xmlns:p14="http://schemas.microsoft.com/office/powerpoint/2010/main" val="898275119"/>
-      </p:ext>
-    </p:extLst>
-  </p:cSld>
-  <p:clrMapOvr>
-    <a:masterClrMapping/>
-  </p:clrMapOvr>
-</p:sld>
-</file>
-
-<file path=ppt/slides/slide7.xml><?xml version="1.0" encoding="utf-8"?>
-<p:sld xmlns:a="http://schemas.openxmlformats.org/drawingml/2006/main" xmlns:r="http://schemas.openxmlformats.org/officeDocument/2006/relationships" xmlns:p="http://schemas.openxmlformats.org/presentationml/2006/main">
-  <p:cSld>
-    <p:spTree>
-      <p:nvGrpSpPr>
-        <p:cNvPr id="1" name=""/>
-        <p:cNvGrpSpPr/>
-        <p:nvPr/>
-      </p:nvGrpSpPr>
-      <p:grpSpPr>
-        <a:xfrm>
-          <a:off x="0" y="0"/>
-          <a:ext cx="0" cy="0"/>
-          <a:chOff x="0" y="0"/>
-          <a:chExt cx="0" cy="0"/>
-        </a:xfrm>
-      </p:grpSpPr>
-      <p:sp>
-        <p:nvSpPr>
-          <p:cNvPr id="2" name="Title 1">
-            <a:extLst>
-              <a:ext uri="{FF2B5EF4-FFF2-40B4-BE49-F238E27FC236}">
-                <a16:creationId xmlns:a16="http://schemas.microsoft.com/office/drawing/2014/main" id="{D06AC56F-C6DC-44C4-BF01-68F0F145FAAA}"/>
-              </a:ext>
-            </a:extLst>
-          </p:cNvPr>
-          <p:cNvSpPr>
-            <a:spLocks noGrp="1"/>
-          </p:cNvSpPr>
-          <p:nvPr>
-            <p:ph type="title"/>
-          </p:nvPr>
-        </p:nvSpPr>
-        <p:spPr/>
-        <p:txBody>
-          <a:bodyPr/>
-          <a:lstStyle/>
-          <a:p>
-            <a:r>
-              <a:rPr lang="en-US" dirty="0"/>
-              <a:t>Sometimes we want to capture</a:t>
-            </a:r>
-          </a:p>
-        </p:txBody>
-      </p:sp>
-      <p:sp>
-        <p:nvSpPr>
-          <p:cNvPr id="3" name="Content Placeholder 2">
-            <a:extLst>
-              <a:ext uri="{FF2B5EF4-FFF2-40B4-BE49-F238E27FC236}">
-                <a16:creationId xmlns:a16="http://schemas.microsoft.com/office/drawing/2014/main" id="{DFFC10AC-A57A-435D-B74E-F6F5353DEFD1}"/>
-              </a:ext>
-            </a:extLst>
-          </p:cNvPr>
-          <p:cNvSpPr>
-            <a:spLocks noGrp="1"/>
-          </p:cNvSpPr>
-          <p:nvPr>
-            <p:ph idx="1"/>
-          </p:nvPr>
-        </p:nvSpPr>
-        <p:spPr>
-          <a:xfrm>
-            <a:off x="273132" y="1825625"/>
-            <a:ext cx="12029704" cy="4351338"/>
-          </a:xfrm>
-        </p:spPr>
-        <p:txBody>
-          <a:bodyPr>
-            <a:normAutofit/>
-          </a:bodyPr>
-          <a:lstStyle/>
-          <a:p>
-            <a:pPr marL="0" indent="0">
-              <a:buNone/>
-            </a:pPr>
-            <a:r>
-              <a:rPr lang="en-US" sz="2400" dirty="0">
-                <a:latin typeface="Consolas" panose="020B0609020204030204" pitchFamily="49" charset="0"/>
-              </a:rPr>
-              <a:t>(define-syntax print-x</a:t>
-            </a:r>
-          </a:p>
-          <a:p>
-            <a:pPr marL="0" indent="0">
-              <a:buNone/>
-            </a:pPr>
-            <a:r>
-              <a:rPr lang="en-US" sz="2400" dirty="0">
-                <a:latin typeface="Consolas" panose="020B0609020204030204" pitchFamily="49" charset="0"/>
-              </a:rPr>
-              <a:t>  (lambda (</a:t>
-            </a:r>
-            <a:r>
-              <a:rPr lang="en-US" sz="2400" dirty="0" err="1">
-                <a:latin typeface="Consolas" panose="020B0609020204030204" pitchFamily="49" charset="0"/>
-              </a:rPr>
-              <a:t>stx</a:t>
-            </a:r>
-            <a:r>
-              <a:rPr lang="en-US" sz="2400" dirty="0">
-                <a:latin typeface="Consolas" panose="020B0609020204030204" pitchFamily="49" charset="0"/>
-              </a:rPr>
-              <a:t>)</a:t>
-            </a:r>
-          </a:p>
-          <a:p>
-            <a:pPr marL="0" indent="0">
-              <a:buNone/>
-            </a:pPr>
-            <a:r>
-              <a:rPr lang="en-US" sz="2400" dirty="0">
-                <a:latin typeface="Consolas" panose="020B0609020204030204" pitchFamily="49" charset="0"/>
-              </a:rPr>
-              <a:t>    (syntax-case </a:t>
-            </a:r>
-            <a:r>
-              <a:rPr lang="en-US" sz="2400" dirty="0" err="1">
-                <a:latin typeface="Consolas" panose="020B0609020204030204" pitchFamily="49" charset="0"/>
-              </a:rPr>
-              <a:t>stx</a:t>
-            </a:r>
-            <a:r>
-              <a:rPr lang="en-US" sz="2400" dirty="0">
-                <a:latin typeface="Consolas" panose="020B0609020204030204" pitchFamily="49" charset="0"/>
-              </a:rPr>
-              <a:t> ()</a:t>
-            </a:r>
-          </a:p>
-          <a:p>
-            <a:pPr marL="0" indent="0">
-              <a:buNone/>
-            </a:pPr>
-            <a:r>
-              <a:rPr lang="en-US" sz="2400" dirty="0">
-                <a:latin typeface="Consolas" panose="020B0609020204030204" pitchFamily="49" charset="0"/>
-              </a:rPr>
-              <a:t>      [(print-x) (with-syntax ([x-in-context (datum-&gt;syntax </a:t>
-            </a:r>
-            <a:r>
-              <a:rPr lang="en-US" sz="2400" dirty="0" err="1">
-                <a:latin typeface="Consolas" panose="020B0609020204030204" pitchFamily="49" charset="0"/>
-              </a:rPr>
-              <a:t>stx</a:t>
-            </a:r>
-            <a:r>
-              <a:rPr lang="en-US" sz="2400" dirty="0">
-                <a:latin typeface="Consolas" panose="020B0609020204030204" pitchFamily="49" charset="0"/>
-              </a:rPr>
-              <a:t> 'x)])</a:t>
-            </a:r>
-          </a:p>
-          <a:p>
-            <a:pPr marL="0" indent="0">
-              <a:buNone/>
-            </a:pPr>
-            <a:r>
-              <a:rPr lang="en-US" sz="2400" dirty="0">
-                <a:latin typeface="Consolas" panose="020B0609020204030204" pitchFamily="49" charset="0"/>
-              </a:rPr>
-              <a:t>                   #'(</a:t>
-            </a:r>
-            <a:r>
-              <a:rPr lang="en-US" sz="2400" dirty="0" err="1">
-                <a:latin typeface="Consolas" panose="020B0609020204030204" pitchFamily="49" charset="0"/>
-              </a:rPr>
-              <a:t>printf</a:t>
-            </a:r>
-            <a:r>
-              <a:rPr lang="en-US" sz="2400" dirty="0">
-                <a:latin typeface="Consolas" panose="020B0609020204030204" pitchFamily="49" charset="0"/>
-              </a:rPr>
-              <a:t> "x is ~</a:t>
-            </a:r>
-            <a:r>
-              <a:rPr lang="en-US" sz="2400" dirty="0" err="1">
-                <a:latin typeface="Consolas" panose="020B0609020204030204" pitchFamily="49" charset="0"/>
-              </a:rPr>
-              <a:t>s~n</a:t>
-            </a:r>
-            <a:r>
-              <a:rPr lang="en-US" sz="2400" dirty="0">
-                <a:latin typeface="Consolas" panose="020B0609020204030204" pitchFamily="49" charset="0"/>
-              </a:rPr>
-              <a:t>" x-in-context))])))</a:t>
-            </a:r>
-          </a:p>
-          <a:p>
-            <a:pPr marL="0" indent="0">
-              <a:buNone/>
-            </a:pPr>
-            <a:endParaRPr lang="en-US" sz="2400" dirty="0">
-              <a:latin typeface="Consolas" panose="020B0609020204030204" pitchFamily="49" charset="0"/>
-            </a:endParaRPr>
-          </a:p>
-          <a:p>
-            <a:pPr marL="0" indent="0">
-              <a:buNone/>
-            </a:pPr>
-            <a:r>
-              <a:rPr lang="en-US" sz="2400" dirty="0">
-                <a:latin typeface="Consolas" panose="020B0609020204030204" pitchFamily="49" charset="0"/>
-              </a:rPr>
-              <a:t>(let ((x 3)) (print-x))</a:t>
-            </a:r>
-          </a:p>
-        </p:txBody>
-      </p:sp>
-      <p:sp>
-        <p:nvSpPr>
-          <p:cNvPr id="4" name="Callout: Line 3">
-            <a:extLst>
-              <a:ext uri="{FF2B5EF4-FFF2-40B4-BE49-F238E27FC236}">
-                <a16:creationId xmlns:a16="http://schemas.microsoft.com/office/drawing/2014/main" id="{F4FC7380-7478-4DA7-8374-D304C7120702}"/>
-              </a:ext>
-            </a:extLst>
-          </p:cNvPr>
-          <p:cNvSpPr/>
-          <p:nvPr/>
-        </p:nvSpPr>
-        <p:spPr>
-          <a:xfrm>
-            <a:off x="8311676" y="1234609"/>
-            <a:ext cx="3368233" cy="1182032"/>
-          </a:xfrm>
-          <a:prstGeom prst="borderCallout1">
-            <a:avLst>
-              <a:gd name="adj1" fmla="val 101603"/>
-              <a:gd name="adj2" fmla="val 88726"/>
-              <a:gd name="adj3" fmla="val 169841"/>
-              <a:gd name="adj4" fmla="val 81853"/>
-            </a:avLst>
-          </a:prstGeom>
-          <a:solidFill>
-            <a:schemeClr val="accent1">
-              <a:lumMod val="20000"/>
-              <a:lumOff val="80000"/>
-            </a:schemeClr>
-          </a:solidFill>
-        </p:spPr>
-        <p:style>
-          <a:lnRef idx="2">
-            <a:schemeClr val="dk1"/>
-          </a:lnRef>
-          <a:fillRef idx="1">
-            <a:schemeClr val="lt1"/>
-          </a:fillRef>
-          <a:effectRef idx="0">
-            <a:schemeClr val="dk1"/>
-          </a:effectRef>
-          <a:fontRef idx="minor">
-            <a:schemeClr val="dk1"/>
-          </a:fontRef>
-        </p:style>
-        <p:txBody>
-          <a:bodyPr rtlCol="0" anchor="ctr"/>
-          <a:lstStyle/>
-          <a:p>
-            <a:pPr algn="ctr"/>
-            <a:r>
-              <a:rPr lang="en-US" dirty="0"/>
-              <a:t>Put in the namespace of the transformed code, not the generated code</a:t>
-            </a:r>
-          </a:p>
-        </p:txBody>
-      </p:sp>
-      <p:sp>
-        <p:nvSpPr>
-          <p:cNvPr id="5" name="Callout: Line 4">
-            <a:extLst>
-              <a:ext uri="{FF2B5EF4-FFF2-40B4-BE49-F238E27FC236}">
-                <a16:creationId xmlns:a16="http://schemas.microsoft.com/office/drawing/2014/main" id="{FC433F22-5895-475A-A36A-78C5CE827612}"/>
-              </a:ext>
-            </a:extLst>
-          </p:cNvPr>
-          <p:cNvSpPr/>
-          <p:nvPr/>
-        </p:nvSpPr>
-        <p:spPr>
-          <a:xfrm>
-            <a:off x="6627558" y="4772760"/>
-            <a:ext cx="4209317" cy="850631"/>
-          </a:xfrm>
-          <a:prstGeom prst="borderCallout1">
-            <a:avLst>
-              <a:gd name="adj1" fmla="val 201"/>
-              <a:gd name="adj2" fmla="val 21957"/>
-              <a:gd name="adj3" fmla="val -86522"/>
-              <a:gd name="adj4" fmla="val -44640"/>
-            </a:avLst>
-          </a:prstGeom>
-          <a:solidFill>
-            <a:schemeClr val="accent1">
-              <a:lumMod val="20000"/>
-              <a:lumOff val="80000"/>
-            </a:schemeClr>
-          </a:solidFill>
-        </p:spPr>
-        <p:style>
-          <a:lnRef idx="2">
-            <a:schemeClr val="dk1"/>
-          </a:lnRef>
-          <a:fillRef idx="1">
-            <a:schemeClr val="lt1"/>
-          </a:fillRef>
-          <a:effectRef idx="0">
-            <a:schemeClr val="dk1"/>
-          </a:effectRef>
-          <a:fontRef idx="minor">
-            <a:schemeClr val="dk1"/>
-          </a:fontRef>
-        </p:style>
-        <p:txBody>
-          <a:bodyPr rtlCol="0" anchor="ctr"/>
-          <a:lstStyle/>
-          <a:p>
-            <a:pPr algn="ctr"/>
-            <a:r>
-              <a:rPr lang="en-US" dirty="0"/>
-              <a:t>Other values not specially constructed however, are still safe from capture</a:t>
-            </a:r>
-          </a:p>
-        </p:txBody>
-      </p:sp>
-    </p:spTree>
-    <p:extLst>
-      <p:ext uri="{BB962C8B-B14F-4D97-AF65-F5344CB8AC3E}">
-        <p14:creationId xmlns:p14="http://schemas.microsoft.com/office/powerpoint/2010/main" val="4014141333"/>
-      </p:ext>
-    </p:extLst>
-  </p:cSld>
-  <p:clrMapOvr>
-    <a:masterClrMapping/>
-  </p:clrMapOvr>
-</p:sld>
-</file>
-
-<file path=ppt/slides/slide8.xml><?xml version="1.0" encoding="utf-8"?>
-<p:sld xmlns:a="http://schemas.openxmlformats.org/drawingml/2006/main" xmlns:r="http://schemas.openxmlformats.org/officeDocument/2006/relationships" xmlns:p="http://schemas.openxmlformats.org/presentationml/2006/main">
-  <p:cSld>
-    <p:spTree>
-      <p:nvGrpSpPr>
-        <p:cNvPr id="1" name=""/>
-        <p:cNvGrpSpPr/>
-        <p:nvPr/>
-      </p:nvGrpSpPr>
-      <p:grpSpPr>
-        <a:xfrm>
-          <a:off x="0" y="0"/>
-          <a:ext cx="0" cy="0"/>
-          <a:chOff x="0" y="0"/>
-          <a:chExt cx="0" cy="0"/>
-        </a:xfrm>
-      </p:grpSpPr>
-      <p:sp>
-        <p:nvSpPr>
-          <p:cNvPr id="2" name="Title 1">
-            <a:extLst>
-              <a:ext uri="{FF2B5EF4-FFF2-40B4-BE49-F238E27FC236}">
-                <a16:creationId xmlns:a16="http://schemas.microsoft.com/office/drawing/2014/main" id="{6AB62B88-2902-4412-BBDD-876C3337B320}"/>
-              </a:ext>
-            </a:extLst>
-          </p:cNvPr>
-          <p:cNvSpPr>
-            <a:spLocks noGrp="1"/>
-          </p:cNvSpPr>
-          <p:nvPr>
-            <p:ph type="title"/>
-          </p:nvPr>
-        </p:nvSpPr>
-        <p:spPr/>
-        <p:txBody>
-          <a:bodyPr/>
-          <a:lstStyle/>
-          <a:p>
-            <a:r>
-              <a:rPr lang="en-US" dirty="0"/>
-              <a:t>Activity if-it</a:t>
-            </a:r>
-          </a:p>
-        </p:txBody>
-      </p:sp>
-      <p:sp>
-        <p:nvSpPr>
-          <p:cNvPr id="3" name="Content Placeholder 2">
-            <a:extLst>
-              <a:ext uri="{FF2B5EF4-FFF2-40B4-BE49-F238E27FC236}">
-                <a16:creationId xmlns:a16="http://schemas.microsoft.com/office/drawing/2014/main" id="{0028535B-BBC3-4547-8508-DF51D52C1C72}"/>
-              </a:ext>
-            </a:extLst>
-          </p:cNvPr>
-          <p:cNvSpPr>
-            <a:spLocks noGrp="1"/>
-          </p:cNvSpPr>
-          <p:nvPr>
-            <p:ph idx="1"/>
-          </p:nvPr>
-        </p:nvSpPr>
-        <p:spPr>
-          <a:xfrm>
-            <a:off x="0" y="1564368"/>
-            <a:ext cx="11709070" cy="4351338"/>
-          </a:xfrm>
-        </p:spPr>
-        <p:txBody>
-          <a:bodyPr/>
-          <a:lstStyle/>
-          <a:p>
-            <a:pPr marL="0" indent="0">
-              <a:spcAft>
-                <a:spcPts val="600"/>
-              </a:spcAft>
-              <a:buNone/>
-            </a:pPr>
-            <a:r>
-              <a:rPr lang="en-US" dirty="0"/>
-              <a:t>Sometimes we want to use the value of an if test</a:t>
-            </a:r>
-          </a:p>
-          <a:p>
-            <a:pPr marL="0" indent="0">
-              <a:spcAft>
-                <a:spcPts val="600"/>
-              </a:spcAft>
-              <a:buNone/>
-            </a:pPr>
-            <a:r>
-              <a:rPr lang="en-US" sz="2400" dirty="0">
-                <a:latin typeface="Consolas" panose="020B0609020204030204" pitchFamily="49" charset="0"/>
-              </a:rPr>
-              <a:t>(if (do-big-calculation 100) (+ 1 (do-big-calculation 100)) #failed)</a:t>
-            </a:r>
-          </a:p>
-          <a:p>
-            <a:pPr marL="0" indent="0">
-              <a:spcAft>
-                <a:spcPts val="600"/>
-              </a:spcAft>
-              <a:buNone/>
-            </a:pPr>
-            <a:r>
-              <a:rPr lang="en-US" sz="2400" dirty="0"/>
-              <a:t>What if we had a variant of if that bound the test to a variable “it”.  The equivalent of:</a:t>
-            </a:r>
-          </a:p>
-          <a:p>
-            <a:pPr marL="0" indent="0">
-              <a:spcAft>
-                <a:spcPts val="600"/>
-              </a:spcAft>
-              <a:buNone/>
-            </a:pPr>
-            <a:r>
-              <a:rPr lang="en-US" sz="2400" dirty="0">
-                <a:latin typeface="Consolas" panose="020B0609020204030204" pitchFamily="49" charset="0"/>
-              </a:rPr>
-              <a:t>(let ((it (do-big-calculation 100)) (if it (+ 1 it) #failed))</a:t>
-            </a:r>
-          </a:p>
-          <a:p>
-            <a:pPr marL="0" indent="0">
-              <a:spcAft>
-                <a:spcPts val="600"/>
-              </a:spcAft>
-              <a:buNone/>
-            </a:pPr>
-            <a:r>
-              <a:rPr lang="en-US" sz="2400" dirty="0"/>
-              <a:t>But without having to explicitly do the let</a:t>
-            </a:r>
-          </a:p>
-          <a:p>
-            <a:pPr marL="0" indent="0">
-              <a:spcAft>
-                <a:spcPts val="600"/>
-              </a:spcAft>
-              <a:buNone/>
-            </a:pPr>
-            <a:r>
-              <a:rPr lang="en-US" sz="2400" dirty="0">
-                <a:latin typeface="Consolas" panose="020B0609020204030204" pitchFamily="49" charset="0"/>
-              </a:rPr>
-              <a:t>(if (do-big-calculation 100) (+ 1 it) #failed)</a:t>
-            </a:r>
-          </a:p>
-          <a:p>
-            <a:pPr marL="0" indent="0">
-              <a:spcAft>
-                <a:spcPts val="600"/>
-              </a:spcAft>
-              <a:buNone/>
-            </a:pPr>
-            <a:r>
-              <a:rPr lang="en-US" sz="2400" dirty="0"/>
-              <a:t>Hint: You’ll want to define it similar to the way we did x in the example.</a:t>
-            </a:r>
-          </a:p>
-          <a:p>
-            <a:pPr marL="0" indent="0">
-              <a:spcAft>
-                <a:spcPts val="600"/>
-              </a:spcAft>
-              <a:buNone/>
-            </a:pPr>
-            <a:endParaRPr lang="en-US" sz="2400" dirty="0"/>
-          </a:p>
-          <a:p>
-            <a:pPr marL="0" indent="0">
-              <a:spcAft>
-                <a:spcPts val="600"/>
-              </a:spcAft>
-              <a:buNone/>
-            </a:pPr>
-            <a:endParaRPr lang="en-US" sz="2400" dirty="0">
-              <a:latin typeface="Consolas" panose="020B0609020204030204" pitchFamily="49" charset="0"/>
-            </a:endParaRPr>
-          </a:p>
-          <a:p>
-            <a:pPr marL="0" indent="0">
-              <a:spcAft>
-                <a:spcPts val="600"/>
-              </a:spcAft>
-              <a:buNone/>
-            </a:pPr>
-            <a:endParaRPr lang="en-US" sz="2400" dirty="0">
-              <a:latin typeface="Consolas" panose="020B0609020204030204" pitchFamily="49" charset="0"/>
-            </a:endParaRPr>
-          </a:p>
-          <a:p>
-            <a:pPr marL="0" indent="0">
-              <a:spcAft>
-                <a:spcPts val="600"/>
-              </a:spcAft>
-              <a:buNone/>
-            </a:pPr>
-            <a:endParaRPr lang="en-US" sz="2400" dirty="0">
-              <a:latin typeface="Consolas" panose="020B0609020204030204" pitchFamily="49" charset="0"/>
-            </a:endParaRPr>
-          </a:p>
-        </p:txBody>
-      </p:sp>
-    </p:spTree>
-    <p:extLst>
-      <p:ext uri="{BB962C8B-B14F-4D97-AF65-F5344CB8AC3E}">
-        <p14:creationId xmlns:p14="http://schemas.microsoft.com/office/powerpoint/2010/main" val="3290595372"/>
-      </p:ext>
-    </p:extLst>
-  </p:cSld>
-  <p:clrMapOvr>
-    <a:masterClrMapping/>
-  </p:clrMapOvr>
-</p:sld>
-</file>
-
-<file path=ppt/slides/slide9.xml><?xml version="1.0" encoding="utf-8"?>
-<p:sld xmlns:a="http://schemas.openxmlformats.org/drawingml/2006/main" xmlns:r="http://schemas.openxmlformats.org/officeDocument/2006/relationships" xmlns:p="http://schemas.openxmlformats.org/presentationml/2006/main">
-  <p:cSld>
-    <p:spTree>
-      <p:nvGrpSpPr>
-        <p:cNvPr id="1" name=""/>
-        <p:cNvGrpSpPr/>
-        <p:nvPr/>
-      </p:nvGrpSpPr>
-      <p:grpSpPr>
-        <a:xfrm>
-          <a:off x="0" y="0"/>
-          <a:ext cx="0" cy="0"/>
-          <a:chOff x="0" y="0"/>
-          <a:chExt cx="0" cy="0"/>
-        </a:xfrm>
-      </p:grpSpPr>
-      <p:sp>
-        <p:nvSpPr>
-          <p:cNvPr id="2" name="Title 1">
-            <a:extLst>
-              <a:ext uri="{FF2B5EF4-FFF2-40B4-BE49-F238E27FC236}">
-                <a16:creationId xmlns:a16="http://schemas.microsoft.com/office/drawing/2014/main" id="{748FC9B3-6B91-4C04-80E7-363D1288C3C6}"/>
-              </a:ext>
-            </a:extLst>
-          </p:cNvPr>
-          <p:cNvSpPr>
-            <a:spLocks noGrp="1"/>
-          </p:cNvSpPr>
-          <p:nvPr>
-            <p:ph type="title"/>
-          </p:nvPr>
-        </p:nvSpPr>
-        <p:spPr/>
-        <p:txBody>
-          <a:bodyPr/>
-          <a:lstStyle/>
-          <a:p>
-            <a:r>
-              <a:rPr lang="en-US" dirty="0"/>
-              <a:t>Macro Expansion occurs before execution</a:t>
-            </a:r>
-          </a:p>
-        </p:txBody>
-      </p:sp>
-      <p:pic>
-        <p:nvPicPr>
-          <p:cNvPr id="5" name="Picture 4">
-            <a:extLst>
-              <a:ext uri="{FF2B5EF4-FFF2-40B4-BE49-F238E27FC236}">
-                <a16:creationId xmlns:a16="http://schemas.microsoft.com/office/drawing/2014/main" id="{F081C50D-AB49-4C64-A716-9209DB3BA6E7}"/>
-              </a:ext>
-            </a:extLst>
-          </p:cNvPr>
-          <p:cNvPicPr>
-            <a:picLocks noChangeAspect="1"/>
-          </p:cNvPicPr>
-          <p:nvPr/>
-        </p:nvPicPr>
-        <p:blipFill>
-          <a:blip r:embed="rId2"/>
-          <a:stretch>
-            <a:fillRect/>
-          </a:stretch>
-        </p:blipFill>
-        <p:spPr>
-          <a:xfrm>
-            <a:off x="1498524" y="1377236"/>
-            <a:ext cx="9459645" cy="5115639"/>
-          </a:xfrm>
-          <a:prstGeom prst="rect">
-            <a:avLst/>
-          </a:prstGeom>
-        </p:spPr>
-      </p:pic>
-    </p:spTree>
-    <p:extLst>
-      <p:ext uri="{BB962C8B-B14F-4D97-AF65-F5344CB8AC3E}">
-        <p14:creationId xmlns:p14="http://schemas.microsoft.com/office/powerpoint/2010/main" val="4163544457"/>
       </p:ext>
     </p:extLst>
   </p:cSld>
@@ -6581,23 +7048,6 @@
 </file>
 
 <file path=customXml/item1.xml><?xml version="1.0" encoding="utf-8"?>
-<p:properties xmlns:p="http://schemas.microsoft.com/office/2006/metadata/properties" xmlns:xsi="http://www.w3.org/2001/XMLSchema-instance" xmlns:pc="http://schemas.microsoft.com/office/infopath/2007/PartnerControls">
-  <documentManagement>
-    <_activity xmlns="5f5b6d61-0e5f-41fd-8596-a1256f5a83b0" xsi:nil="true"/>
-  </documentManagement>
-</p:properties>
-</file>
-
-<file path=customXml/item2.xml><?xml version="1.0" encoding="utf-8"?>
-<?mso-contentType ?>
-<FormTemplates xmlns="http://schemas.microsoft.com/sharepoint/v3/contenttype/forms">
-  <Display>DocumentLibraryForm</Display>
-  <Edit>DocumentLibraryForm</Edit>
-  <New>DocumentLibraryForm</New>
-</FormTemplates>
-</file>
-
-<file path=customXml/item3.xml><?xml version="1.0" encoding="utf-8"?>
 <ct:contentTypeSchema xmlns:ct="http://schemas.microsoft.com/office/2006/metadata/contentType" xmlns:ma="http://schemas.microsoft.com/office/2006/metadata/properties/metaAttributes" ct:_="" ma:_="" ma:contentTypeName="Document" ma:contentTypeID="0x01010059CE426D428CEF499B332ADC3ADB3636" ma:contentTypeVersion="15" ma:contentTypeDescription="Create a new document." ma:contentTypeScope="" ma:versionID="33e6dfaf1a47dca333a7629626a3e18d">
   <xsd:schema xmlns:xsd="http://www.w3.org/2001/XMLSchema" xmlns:xs="http://www.w3.org/2001/XMLSchema" xmlns:p="http://schemas.microsoft.com/office/2006/metadata/properties" xmlns:ns3="5f5b6d61-0e5f-41fd-8596-a1256f5a83b0" xmlns:ns4="f0b9717a-2b57-40f9-a089-7ad30d640f15" targetNamespace="http://schemas.microsoft.com/office/2006/metadata/properties" ma:root="true" ma:fieldsID="9fc19125a57afee62d33e895960898df" ns3:_="" ns4:_="">
     <xsd:import namespace="5f5b6d61-0e5f-41fd-8596-a1256f5a83b0"/>
@@ -6832,32 +7282,24 @@
 </ct:contentTypeSchema>
 </file>
 
-<file path=customXml/itemProps1.xml><?xml version="1.0" encoding="utf-8"?>
-<ds:datastoreItem xmlns:ds="http://schemas.openxmlformats.org/officeDocument/2006/customXml" ds:itemID="{8E741AA0-9B3C-4459-9F97-862626D74B5F}">
-  <ds:schemaRefs>
-    <ds:schemaRef ds:uri="http://schemas.microsoft.com/office/2006/documentManagement/types"/>
-    <ds:schemaRef ds:uri="http://www.w3.org/XML/1998/namespace"/>
-    <ds:schemaRef ds:uri="http://schemas.microsoft.com/office/infopath/2007/PartnerControls"/>
-    <ds:schemaRef ds:uri="http://schemas.microsoft.com/office/2006/metadata/properties"/>
-    <ds:schemaRef ds:uri="http://purl.org/dc/dcmitype/"/>
-    <ds:schemaRef ds:uri="http://schemas.openxmlformats.org/package/2006/metadata/core-properties"/>
-    <ds:schemaRef ds:uri="5f5b6d61-0e5f-41fd-8596-a1256f5a83b0"/>
-    <ds:schemaRef ds:uri="http://purl.org/dc/elements/1.1/"/>
-    <ds:schemaRef ds:uri="f0b9717a-2b57-40f9-a089-7ad30d640f15"/>
-    <ds:schemaRef ds:uri="http://purl.org/dc/terms/"/>
-  </ds:schemaRefs>
-</ds:datastoreItem>
+<file path=customXml/item2.xml><?xml version="1.0" encoding="utf-8"?>
+<?mso-contentType ?>
+<FormTemplates xmlns="http://schemas.microsoft.com/sharepoint/v3/contenttype/forms">
+  <Display>DocumentLibraryForm</Display>
+  <Edit>DocumentLibraryForm</Edit>
+  <New>DocumentLibraryForm</New>
+</FormTemplates>
 </file>
 
-<file path=customXml/itemProps2.xml><?xml version="1.0" encoding="utf-8"?>
-<ds:datastoreItem xmlns:ds="http://schemas.openxmlformats.org/officeDocument/2006/customXml" ds:itemID="{C23C1880-AA5B-4CD9-A675-31266D1AC92A}">
-  <ds:schemaRefs>
-    <ds:schemaRef ds:uri="http://schemas.microsoft.com/sharepoint/v3/contenttype/forms"/>
-  </ds:schemaRefs>
-</ds:datastoreItem>
+<file path=customXml/item3.xml><?xml version="1.0" encoding="utf-8"?>
+<p:properties xmlns:p="http://schemas.microsoft.com/office/2006/metadata/properties" xmlns:xsi="http://www.w3.org/2001/XMLSchema-instance" xmlns:pc="http://schemas.microsoft.com/office/infopath/2007/PartnerControls">
+  <documentManagement>
+    <_activity xmlns="5f5b6d61-0e5f-41fd-8596-a1256f5a83b0" xsi:nil="true"/>
+  </documentManagement>
+</p:properties>
 </file>
 
-<file path=customXml/itemProps3.xml><?xml version="1.0" encoding="utf-8"?>
+<file path=customXml/itemProps1.xml><?xml version="1.0" encoding="utf-8"?>
 <ds:datastoreItem xmlns:ds="http://schemas.openxmlformats.org/officeDocument/2006/customXml" ds:itemID="{E4B1A154-5096-4F87-8B15-AA00FED7786E}">
   <ds:schemaRefs>
     <ds:schemaRef ds:uri="http://schemas.microsoft.com/office/2006/metadata/contentType"/>
@@ -6874,4 +7316,29 @@
     <ds:schemaRef ds:uri="http://schemas.microsoft.com/internal/obd"/>
   </ds:schemaRefs>
 </ds:datastoreItem>
+</file>
+
+<file path=customXml/itemProps2.xml><?xml version="1.0" encoding="utf-8"?>
+<ds:datastoreItem xmlns:ds="http://schemas.openxmlformats.org/officeDocument/2006/customXml" ds:itemID="{C23C1880-AA5B-4CD9-A675-31266D1AC92A}">
+  <ds:schemaRefs>
+    <ds:schemaRef ds:uri="http://schemas.microsoft.com/sharepoint/v3/contenttype/forms"/>
+  </ds:schemaRefs>
+</ds:datastoreItem>
+</file>
+
+<file path=customXml/itemProps3.xml><?xml version="1.0" encoding="utf-8"?>
+<ds:datastoreItem xmlns:ds="http://schemas.openxmlformats.org/officeDocument/2006/customXml" ds:itemID="{8E741AA0-9B3C-4459-9F97-862626D74B5F}">
+  <ds:schemaRefs>
+    <ds:schemaRef ds:uri="http://schemas.microsoft.com/office/2006/documentManagement/types"/>
+    <ds:schemaRef ds:uri="http://www.w3.org/XML/1998/namespace"/>
+    <ds:schemaRef ds:uri="http://schemas.microsoft.com/office/infopath/2007/PartnerControls"/>
+    <ds:schemaRef ds:uri="http://schemas.microsoft.com/office/2006/metadata/properties"/>
+    <ds:schemaRef ds:uri="http://purl.org/dc/dcmitype/"/>
+    <ds:schemaRef ds:uri="http://schemas.openxmlformats.org/package/2006/metadata/core-properties"/>
+    <ds:schemaRef ds:uri="5f5b6d61-0e5f-41fd-8596-a1256f5a83b0"/>
+    <ds:schemaRef ds:uri="http://purl.org/dc/elements/1.1/"/>
+    <ds:schemaRef ds:uri="f0b9717a-2b57-40f9-a089-7ad30d640f15"/>
+    <ds:schemaRef ds:uri="http://purl.org/dc/terms/"/>
+  </ds:schemaRefs>
+</ds:datastoreItem>
 </file>